--- a/exports/pptx/lessons/senior-module-10-herbs-aushadhi/day-02-tulsi.pptx
+++ b/exports/pptx/lessons/senior-module-10-herbs-aushadhi/day-02-tulsi.pptx
@@ -3666,7 +3666,7 @@
         <p:spPr>
           <a:xfrm>
             <a:off x="634901" y="883593"/>
-            <a:ext cx="8102798" cy="1462683"/>
+            <a:ext cx="8102798" cy="487561"/>
           </a:xfrm>
           <a:prstGeom prst="rect">
             <a:avLst/>
@@ -3697,7 +3697,7 @@
                 <a:ea typeface="Georgia" pitchFamily="34" charset="-122"/>
                 <a:cs typeface="Georgia" pitchFamily="34" charset="-120"/>
               </a:rPr>
-              <a:t>State the observable phenomenon first.</a:t>
+              <a:t>Botanical identification.</a:t>
             </a:r>
             <a:pPr algn="l" indent="0" marL="0">
               <a:lnSpc>
@@ -3717,10 +3717,232 @@
                 <a:ea typeface="Georgia" pitchFamily="34" charset="-122"/>
                 <a:cs typeface="Georgia" pitchFamily="34" charset="-120"/>
               </a:rPr>
-              <a:t> Whatever the day's idea is — a number trick, a celestial pattern, a herb's identifying feature — start with the thing students can see, hear, or do.</a:t>
+              <a:t> </a:t>
+            </a:r>
+            <a:pPr algn="l" indent="0" marL="0">
+              <a:lnSpc>
+                <a:spcPts val="1620"/>
+              </a:lnSpc>
+              <a:spcAft>
+                <a:spcPts val="300"/>
+              </a:spcAft>
+              <a:buNone/>
+            </a:pPr>
+            <a:r>
+              <a:rPr lang="en-US" sz="1200" i="1" dirty="0">
+                <a:solidFill>
+                  <a:srgbClr val="1A1A1A"/>
+                </a:solidFill>
+                <a:latin typeface="Georgia" pitchFamily="34" charset="0"/>
+                <a:ea typeface="Georgia" pitchFamily="34" charset="-122"/>
+                <a:cs typeface="Georgia" pitchFamily="34" charset="-120"/>
+              </a:rPr>
+              <a:t>Ocimum tenuiflorum</a:t>
+            </a:r>
+            <a:pPr algn="l" indent="0" marL="0">
+              <a:lnSpc>
+                <a:spcPts val="1620"/>
+              </a:lnSpc>
+              <a:spcAft>
+                <a:spcPts val="300"/>
+              </a:spcAft>
+              <a:buNone/>
+            </a:pPr>
+            <a:r>
+              <a:rPr lang="en-US" sz="1200" dirty="0">
+                <a:solidFill>
+                  <a:srgbClr val="1A1A1A"/>
+                </a:solidFill>
+                <a:latin typeface="Georgia" pitchFamily="34" charset="0"/>
+                <a:ea typeface="Georgia" pitchFamily="34" charset="-122"/>
+                <a:cs typeface="Georgia" pitchFamily="34" charset="-120"/>
+              </a:rPr>
+              <a:t> (also </a:t>
+            </a:r>
+            <a:pPr algn="l" indent="0" marL="0">
+              <a:lnSpc>
+                <a:spcPts val="1620"/>
+              </a:lnSpc>
+              <a:spcAft>
+                <a:spcPts val="300"/>
+              </a:spcAft>
+              <a:buNone/>
+            </a:pPr>
+            <a:r>
+              <a:rPr lang="en-US" sz="1200" i="1" dirty="0">
+                <a:solidFill>
+                  <a:srgbClr val="1A1A1A"/>
+                </a:solidFill>
+                <a:latin typeface="Georgia" pitchFamily="34" charset="0"/>
+                <a:ea typeface="Georgia" pitchFamily="34" charset="-122"/>
+                <a:cs typeface="Georgia" pitchFamily="34" charset="-120"/>
+              </a:rPr>
+              <a:t>O. sanctum</a:t>
+            </a:r>
+            <a:pPr algn="l" indent="0" marL="0">
+              <a:lnSpc>
+                <a:spcPts val="1620"/>
+              </a:lnSpc>
+              <a:spcAft>
+                <a:spcPts val="300"/>
+              </a:spcAft>
+              <a:buNone/>
+            </a:pPr>
+            <a:r>
+              <a:rPr lang="en-US" sz="1200" dirty="0">
+                <a:solidFill>
+                  <a:srgbClr val="1A1A1A"/>
+                </a:solidFill>
+                <a:latin typeface="Georgia" pitchFamily="34" charset="0"/>
+                <a:ea typeface="Georgia" pitchFamily="34" charset="-122"/>
+                <a:cs typeface="Georgia" pitchFamily="34" charset="-120"/>
+              </a:rPr>
+              <a:t>). Square stem, opposite leaves with serrated edges, distinctive aromatic oil glands. Multiple cultivars: </a:t>
+            </a:r>
+            <a:pPr algn="l" indent="0" marL="0">
+              <a:lnSpc>
+                <a:spcPts val="1620"/>
+              </a:lnSpc>
+              <a:spcAft>
+                <a:spcPts val="300"/>
+              </a:spcAft>
+              <a:buNone/>
+            </a:pPr>
+            <a:r>
+              <a:rPr lang="en-US" sz="1200" i="1" dirty="0">
+                <a:solidFill>
+                  <a:srgbClr val="1A1A1A"/>
+                </a:solidFill>
+                <a:latin typeface="Georgia" pitchFamily="34" charset="0"/>
+                <a:ea typeface="Georgia" pitchFamily="34" charset="-122"/>
+                <a:cs typeface="Georgia" pitchFamily="34" charset="-120"/>
+              </a:rPr>
+              <a:t>Rama tulasī</a:t>
+            </a:r>
+            <a:pPr algn="l" indent="0" marL="0">
+              <a:lnSpc>
+                <a:spcPts val="1620"/>
+              </a:lnSpc>
+              <a:spcAft>
+                <a:spcPts val="300"/>
+              </a:spcAft>
+              <a:buNone/>
+            </a:pPr>
+            <a:r>
+              <a:rPr lang="en-US" sz="1200" dirty="0">
+                <a:solidFill>
+                  <a:srgbClr val="1A1A1A"/>
+                </a:solidFill>
+                <a:latin typeface="Georgia" pitchFamily="34" charset="0"/>
+                <a:ea typeface="Georgia" pitchFamily="34" charset="-122"/>
+                <a:cs typeface="Georgia" pitchFamily="34" charset="-120"/>
+              </a:rPr>
+              <a:t> (green), </a:t>
+            </a:r>
+            <a:pPr algn="l" indent="0" marL="0">
+              <a:lnSpc>
+                <a:spcPts val="1620"/>
+              </a:lnSpc>
+              <a:spcAft>
+                <a:spcPts val="300"/>
+              </a:spcAft>
+              <a:buNone/>
+            </a:pPr>
+            <a:r>
+              <a:rPr lang="en-US" sz="1200" i="1" dirty="0">
+                <a:solidFill>
+                  <a:srgbClr val="1A1A1A"/>
+                </a:solidFill>
+                <a:latin typeface="Georgia" pitchFamily="34" charset="0"/>
+                <a:ea typeface="Georgia" pitchFamily="34" charset="-122"/>
+                <a:cs typeface="Georgia" pitchFamily="34" charset="-120"/>
+              </a:rPr>
+              <a:t>Kṛṣṇa tulasī</a:t>
+            </a:r>
+            <a:pPr algn="l" indent="0" marL="0">
+              <a:lnSpc>
+                <a:spcPts val="1620"/>
+              </a:lnSpc>
+              <a:spcAft>
+                <a:spcPts val="300"/>
+              </a:spcAft>
+              <a:buNone/>
+            </a:pPr>
+            <a:r>
+              <a:rPr lang="en-US" sz="1200" dirty="0">
+                <a:solidFill>
+                  <a:srgbClr val="1A1A1A"/>
+                </a:solidFill>
+                <a:latin typeface="Georgia" pitchFamily="34" charset="0"/>
+                <a:ea typeface="Georgia" pitchFamily="34" charset="-122"/>
+                <a:cs typeface="Georgia" pitchFamily="34" charset="-120"/>
+              </a:rPr>
+              <a:t> (purple), </a:t>
+            </a:r>
+            <a:pPr algn="l" indent="0" marL="0">
+              <a:lnSpc>
+                <a:spcPts val="1620"/>
+              </a:lnSpc>
+              <a:spcAft>
+                <a:spcPts val="300"/>
+              </a:spcAft>
+              <a:buNone/>
+            </a:pPr>
+            <a:r>
+              <a:rPr lang="en-US" sz="1200" i="1" dirty="0">
+                <a:solidFill>
+                  <a:srgbClr val="1A1A1A"/>
+                </a:solidFill>
+                <a:latin typeface="Georgia" pitchFamily="34" charset="0"/>
+                <a:ea typeface="Georgia" pitchFamily="34" charset="-122"/>
+                <a:cs typeface="Georgia" pitchFamily="34" charset="-120"/>
+              </a:rPr>
+              <a:t>Vana tulasī</a:t>
+            </a:r>
+            <a:pPr algn="l" indent="0" marL="0">
+              <a:lnSpc>
+                <a:spcPts val="1620"/>
+              </a:lnSpc>
+              <a:spcAft>
+                <a:spcPts val="300"/>
+              </a:spcAft>
+              <a:buNone/>
+            </a:pPr>
+            <a:r>
+              <a:rPr lang="en-US" sz="1200" dirty="0">
+                <a:solidFill>
+                  <a:srgbClr val="1A1A1A"/>
+                </a:solidFill>
+                <a:latin typeface="Georgia" pitchFamily="34" charset="0"/>
+                <a:ea typeface="Georgia" pitchFamily="34" charset="-122"/>
+                <a:cs typeface="Georgia" pitchFamily="34" charset="-120"/>
+              </a:rPr>
+              <a:t> (wild).</a:t>
             </a:r>
             <a:endParaRPr lang="en-US" sz="1200" dirty="0"/>
           </a:p>
+        </p:txBody>
+      </p:sp>
+      <p:sp>
+        <p:nvSpPr>
+          <p:cNvPr id="5" name="Text 3"/>
+          <p:cNvSpPr/>
+          <p:nvPr/>
+        </p:nvSpPr>
+        <p:spPr>
+          <a:xfrm>
+            <a:off x="634901" y="1472654"/>
+            <a:ext cx="8102798" cy="487561"/>
+          </a:xfrm>
+          <a:prstGeom prst="rect">
+            <a:avLst/>
+          </a:prstGeom>
+          <a:noFill/>
+          <a:ln/>
+        </p:spPr>
+        <p:txBody>
+          <a:bodyPr wrap="square" lIns="0" tIns="0" rIns="0" bIns="0" rtlCol="0" anchor="t"/>
+          <a:lstStyle/>
           <a:p>
             <a:pPr algn="l" marL="342900" indent="-342900">
               <a:lnSpc>
@@ -3741,7 +3963,7 @@
                 <a:ea typeface="Georgia" pitchFamily="34" charset="-122"/>
                 <a:cs typeface="Georgia" pitchFamily="34" charset="-120"/>
               </a:rPr>
-              <a:t>Introduce the Sanskrit term.</a:t>
+              <a:t>Active compound.</a:t>
             </a:r>
             <a:pPr algn="l" indent="0" marL="0">
               <a:lnSpc>
@@ -3761,10 +3983,72 @@
                 <a:ea typeface="Georgia" pitchFamily="34" charset="-122"/>
                 <a:cs typeface="Georgia" pitchFamily="34" charset="-120"/>
               </a:rPr>
-              <a:t> Once, in the triple format, then italicised only.</a:t>
+              <a:t> Eugenol (60-70% of essential oil), ursolic acid, rosmarinic acid. Some research on adaptogenic / anti-inflammatory effects (Cohen, 2014 — </a:t>
+            </a:r>
+            <a:pPr algn="l" indent="0" marL="0">
+              <a:lnSpc>
+                <a:spcPts val="1620"/>
+              </a:lnSpc>
+              <a:spcAft>
+                <a:spcPts val="300"/>
+              </a:spcAft>
+              <a:buNone/>
+            </a:pPr>
+            <a:r>
+              <a:rPr lang="en-US" sz="1200" i="1" dirty="0">
+                <a:solidFill>
+                  <a:srgbClr val="1A1A1A"/>
+                </a:solidFill>
+                <a:latin typeface="Georgia" pitchFamily="34" charset="0"/>
+                <a:ea typeface="Georgia" pitchFamily="34" charset="-122"/>
+                <a:cs typeface="Georgia" pitchFamily="34" charset="-120"/>
+              </a:rPr>
+              <a:t>Journal of Ayurveda and Integrative Medicine</a:t>
+            </a:r>
+            <a:pPr algn="l" indent="0" marL="0">
+              <a:lnSpc>
+                <a:spcPts val="1620"/>
+              </a:lnSpc>
+              <a:spcAft>
+                <a:spcPts val="300"/>
+              </a:spcAft>
+              <a:buNone/>
+            </a:pPr>
+            <a:r>
+              <a:rPr lang="en-US" sz="1200" dirty="0">
+                <a:solidFill>
+                  <a:srgbClr val="1A1A1A"/>
+                </a:solidFill>
+                <a:latin typeface="Georgia" pitchFamily="34" charset="0"/>
+                <a:ea typeface="Georgia" pitchFamily="34" charset="-122"/>
+                <a:cs typeface="Georgia" pitchFamily="34" charset="-120"/>
+              </a:rPr>
+              <a:t>).</a:t>
             </a:r>
             <a:endParaRPr lang="en-US" sz="1200" dirty="0"/>
           </a:p>
+        </p:txBody>
+      </p:sp>
+      <p:sp>
+        <p:nvSpPr>
+          <p:cNvPr id="6" name="Text 4"/>
+          <p:cNvSpPr/>
+          <p:nvPr/>
+        </p:nvSpPr>
+        <p:spPr>
+          <a:xfrm>
+            <a:off x="634901" y="2061716"/>
+            <a:ext cx="8102798" cy="487561"/>
+          </a:xfrm>
+          <a:prstGeom prst="rect">
+            <a:avLst/>
+          </a:prstGeom>
+          <a:noFill/>
+          <a:ln/>
+        </p:spPr>
+        <p:txBody>
+          <a:bodyPr wrap="square" lIns="0" tIns="0" rIns="0" bIns="0" rtlCol="0" anchor="t"/>
+          <a:lstStyle/>
           <a:p>
             <a:pPr algn="l" marL="342900" indent="-342900">
               <a:lnSpc>
@@ -3785,7 +4069,7 @@
                 <a:ea typeface="Georgia" pitchFamily="34" charset="-122"/>
                 <a:cs typeface="Georgia" pitchFamily="34" charset="-120"/>
               </a:rPr>
-              <a:t>Build the conceptual map.</a:t>
+              <a:t>Traditional uses.</a:t>
             </a:r>
             <a:pPr algn="l" indent="0" marL="0">
               <a:lnSpc>
@@ -3805,10 +4089,72 @@
                 <a:ea typeface="Georgia" pitchFamily="34" charset="-122"/>
                 <a:cs typeface="Georgia" pitchFamily="34" charset="-120"/>
               </a:rPr>
-              <a:t> Connect today's idea to prior modules (especially Module 2 if applicable) and prior days.</a:t>
+              <a:t> Caraka and Suśruta cite </a:t>
+            </a:r>
+            <a:pPr algn="l" indent="0" marL="0">
+              <a:lnSpc>
+                <a:spcPts val="1620"/>
+              </a:lnSpc>
+              <a:spcAft>
+                <a:spcPts val="300"/>
+              </a:spcAft>
+              <a:buNone/>
+            </a:pPr>
+            <a:r>
+              <a:rPr lang="en-US" sz="1200" i="1" dirty="0">
+                <a:solidFill>
+                  <a:srgbClr val="1A1A1A"/>
+                </a:solidFill>
+                <a:latin typeface="Georgia" pitchFamily="34" charset="0"/>
+                <a:ea typeface="Georgia" pitchFamily="34" charset="-122"/>
+                <a:cs typeface="Georgia" pitchFamily="34" charset="-120"/>
+              </a:rPr>
+              <a:t>tulasī</a:t>
+            </a:r>
+            <a:pPr algn="l" indent="0" marL="0">
+              <a:lnSpc>
+                <a:spcPts val="1620"/>
+              </a:lnSpc>
+              <a:spcAft>
+                <a:spcPts val="300"/>
+              </a:spcAft>
+              <a:buNone/>
+            </a:pPr>
+            <a:r>
+              <a:rPr lang="en-US" sz="1200" dirty="0">
+                <a:solidFill>
+                  <a:srgbClr val="1A1A1A"/>
+                </a:solidFill>
+                <a:latin typeface="Georgia" pitchFamily="34" charset="0"/>
+                <a:ea typeface="Georgia" pitchFamily="34" charset="-122"/>
+                <a:cs typeface="Georgia" pitchFamily="34" charset="-120"/>
+              </a:rPr>
+              <a:t> for: cough, cold, low-grade fever, indigestion (in tea form), as a bedside plant for air quality.</a:t>
             </a:r>
             <a:endParaRPr lang="en-US" sz="1200" dirty="0"/>
           </a:p>
+        </p:txBody>
+      </p:sp>
+      <p:sp>
+        <p:nvSpPr>
+          <p:cNvPr id="7" name="Text 5"/>
+          <p:cNvSpPr/>
+          <p:nvPr/>
+        </p:nvSpPr>
+        <p:spPr>
+          <a:xfrm>
+            <a:off x="634901" y="2650778"/>
+            <a:ext cx="8102798" cy="487561"/>
+          </a:xfrm>
+          <a:prstGeom prst="rect">
+            <a:avLst/>
+          </a:prstGeom>
+          <a:noFill/>
+          <a:ln/>
+        </p:spPr>
+        <p:txBody>
+          <a:bodyPr wrap="square" lIns="0" tIns="0" rIns="0" bIns="0" rtlCol="0" anchor="t"/>
+          <a:lstStyle/>
           <a:p>
             <a:pPr algn="l" marL="342900" indent="-342900">
               <a:lnSpc>
@@ -3829,7 +4175,7 @@
                 <a:ea typeface="Georgia" pitchFamily="34" charset="-122"/>
                 <a:cs typeface="Georgia" pitchFamily="34" charset="-120"/>
               </a:rPr>
-              <a:t>Work an example</a:t>
+              <a:t>Source.</a:t>
             </a:r>
             <a:pPr algn="l" indent="0" marL="0">
               <a:lnSpc>
@@ -3849,10 +4195,72 @@
                 <a:ea typeface="Georgia" pitchFamily="34" charset="-122"/>
                 <a:cs typeface="Georgia" pitchFamily="34" charset="-120"/>
               </a:rPr>
-              <a:t> with the whole class on the board.</a:t>
+              <a:t> Atharva Veda 10.97 — Auṣadhi Sūkta — though not naming tulasī specifically, the framing of "herbs as healing beings" begins here. Caraka </a:t>
+            </a:r>
+            <a:pPr algn="l" indent="0" marL="0">
+              <a:lnSpc>
+                <a:spcPts val="1620"/>
+              </a:lnSpc>
+              <a:spcAft>
+                <a:spcPts val="300"/>
+              </a:spcAft>
+              <a:buNone/>
+            </a:pPr>
+            <a:r>
+              <a:rPr lang="en-US" sz="1200" i="1" dirty="0">
+                <a:solidFill>
+                  <a:srgbClr val="1A1A1A"/>
+                </a:solidFill>
+                <a:latin typeface="Georgia" pitchFamily="34" charset="0"/>
+                <a:ea typeface="Georgia" pitchFamily="34" charset="-122"/>
+                <a:cs typeface="Georgia" pitchFamily="34" charset="-120"/>
+              </a:rPr>
+              <a:t>Sūtrasthāna</a:t>
+            </a:r>
+            <a:pPr algn="l" indent="0" marL="0">
+              <a:lnSpc>
+                <a:spcPts val="1620"/>
+              </a:lnSpc>
+              <a:spcAft>
+                <a:spcPts val="300"/>
+              </a:spcAft>
+              <a:buNone/>
+            </a:pPr>
+            <a:r>
+              <a:rPr lang="en-US" sz="1200" dirty="0">
+                <a:solidFill>
+                  <a:srgbClr val="1A1A1A"/>
+                </a:solidFill>
+                <a:latin typeface="Georgia" pitchFamily="34" charset="0"/>
+                <a:ea typeface="Georgia" pitchFamily="34" charset="-122"/>
+                <a:cs typeface="Georgia" pitchFamily="34" charset="-120"/>
+              </a:rPr>
+              <a:t> 26 lists tulasī formally.</a:t>
             </a:r>
             <a:endParaRPr lang="en-US" sz="1200" dirty="0"/>
           </a:p>
+        </p:txBody>
+      </p:sp>
+      <p:sp>
+        <p:nvSpPr>
+          <p:cNvPr id="8" name="Text 6"/>
+          <p:cNvSpPr/>
+          <p:nvPr/>
+        </p:nvSpPr>
+        <p:spPr>
+          <a:xfrm>
+            <a:off x="634901" y="3239839"/>
+            <a:ext cx="8102798" cy="487561"/>
+          </a:xfrm>
+          <a:prstGeom prst="rect">
+            <a:avLst/>
+          </a:prstGeom>
+          <a:noFill/>
+          <a:ln/>
+        </p:spPr>
+        <p:txBody>
+          <a:bodyPr wrap="square" lIns="0" tIns="0" rIns="0" bIns="0" rtlCol="0" anchor="t"/>
+          <a:lstStyle/>
           <a:p>
             <a:pPr algn="l" marL="342900" indent="-342900">
               <a:lnSpc>
@@ -3873,7 +4281,7 @@
                 <a:ea typeface="Georgia" pitchFamily="34" charset="-122"/>
                 <a:cs typeface="Georgia" pitchFamily="34" charset="-120"/>
               </a:rPr>
-              <a:t>Independent or paired practice</a:t>
+              <a:t>Smell-test demo.</a:t>
             </a:r>
             <a:pPr algn="l" indent="0" marL="0">
               <a:lnSpc>
@@ -3893,7 +4301,7 @@
                 <a:ea typeface="Georgia" pitchFamily="34" charset="-122"/>
                 <a:cs typeface="Georgia" pitchFamily="34" charset="-120"/>
               </a:rPr>
-              <a:t> for ~5 minutes.</a:t>
+              <a:t> Crush a leaf; pass around. Note clove-like aroma (eugenol). Modern aroma-chemistry: same compound (eugenol) gives cloves their scent.</a:t>
             </a:r>
             <a:endParaRPr lang="en-US" sz="1200" dirty="0"/>
           </a:p>
@@ -3901,7 +4309,7 @@
       </p:sp>
       <p:sp>
         <p:nvSpPr>
-          <p:cNvPr id="5" name="Text 3"/>
+          <p:cNvPr id="9" name="Text 7"/>
           <p:cNvSpPr/>
           <p:nvPr/>
         </p:nvSpPr>

--- a/exports/pptx/lessons/senior-module-10-herbs-aushadhi/day-02-tulsi.pptx
+++ b/exports/pptx/lessons/senior-module-10-herbs-aushadhi/day-02-tulsi.pptx
@@ -16,9 +16,12 @@
     <p:sldId id="264" r:id="rId10"/>
     <p:sldId id="265" r:id="rId11"/>
     <p:sldId id="266" r:id="rId12"/>
+    <p:sldId id="267" r:id="rId13"/>
+    <p:sldId id="268" r:id="rId14"/>
+    <p:sldId id="269" r:id="rId15"/>
   </p:sldIdLst>
   <p:notesMasterIdLst>
-    <p:notesMasterId r:id="rId13"/>
+    <p:notesMasterId r:id="rId16"/>
   </p:notesMasterIdLst>
   <p:sldSz cx="9144000" cy="5143500"/>
   <p:notesSz cx="5143500" cy="9144000"/>
@@ -712,6 +715,270 @@
             <a:fld id="{F7021451-1387-4CA6-816F-3879F97B5CBC}" type="slidenum">
               <a:rPr lang="en-US"/>
               <a:t>11</a:t>
+            </a:fld>
+            <a:endParaRPr lang="en-US"/>
+          </a:p>
+        </p:txBody>
+      </p:sp>
+    </p:spTree>
+    <p:extLst>
+      <p:ext uri="{BB962C8B-B14F-4D97-AF65-F5344CB8AC3E}">
+        <p14:creationId xmlns:p14="http://schemas.microsoft.com/office/powerpoint/2010/main" val="1024086991"/>
+      </p:ext>
+    </p:extLst>
+  </p:cSld>
+  <p:clrMapOvr>
+    <a:masterClrMapping/>
+  </p:clrMapOvr>
+</p:notes>
+</file>
+
+<file path=ppt/notesSlides/notesSlide12.xml><?xml version="1.0" encoding="utf-8"?>
+<p:notes xmlns:a="http://schemas.openxmlformats.org/drawingml/2006/main" xmlns:r="http://schemas.openxmlformats.org/officeDocument/2006/relationships" xmlns:p="http://schemas.openxmlformats.org/presentationml/2006/main">
+  <p:cSld>
+    <p:spTree>
+      <p:nvGrpSpPr>
+        <p:cNvPr id="1" name=""/>
+        <p:cNvGrpSpPr/>
+        <p:nvPr/>
+      </p:nvGrpSpPr>
+      <p:grpSpPr>
+        <a:xfrm>
+          <a:off x="0" y="0"/>
+          <a:ext cx="0" cy="0"/>
+          <a:chOff x="0" y="0"/>
+          <a:chExt cx="0" cy="0"/>
+        </a:xfrm>
+      </p:grpSpPr>
+      <p:sp>
+        <p:nvSpPr>
+          <p:cNvPr id="2" name="Slide Image Placeholder 1"/>
+          <p:cNvSpPr>
+            <a:spLocks noGrp="1" noRot="1" noChangeAspect="1"/>
+          </p:cNvSpPr>
+          <p:nvPr>
+            <p:ph type="sldImg"/>
+          </p:nvPr>
+        </p:nvSpPr>
+        <p:spPr/>
+      </p:sp>
+      <p:sp>
+        <p:nvSpPr>
+          <p:cNvPr id="3" name="Notes Placeholder 2"/>
+          <p:cNvSpPr>
+            <a:spLocks noGrp="1"/>
+          </p:cNvSpPr>
+          <p:nvPr>
+            <p:ph type="body" idx="1"/>
+          </p:nvPr>
+        </p:nvSpPr>
+        <p:spPr/>
+        <p:txBody>
+          <a:bodyPr/>
+          <a:lstStyle/>
+          <a:p>
+            <a:r>
+              <a:rPr lang="en-US" dirty="0"/>
+              <a:t/>
+            </a:r>
+            <a:endParaRPr lang="en-US" dirty="0"/>
+          </a:p>
+        </p:txBody>
+      </p:sp>
+      <p:sp>
+        <p:nvSpPr>
+          <p:cNvPr id="4" name="Slide Number Placeholder 3"/>
+          <p:cNvSpPr>
+            <a:spLocks noGrp="1"/>
+          </p:cNvSpPr>
+          <p:nvPr>
+            <p:ph type="sldNum" sz="quarter" idx="10"/>
+          </p:nvPr>
+        </p:nvSpPr>
+        <p:spPr/>
+        <p:txBody>
+          <a:bodyPr/>
+          <a:lstStyle/>
+          <a:p>
+            <a:fld id="{F7021451-1387-4CA6-816F-3879F97B5CBC}" type="slidenum">
+              <a:rPr lang="en-US"/>
+              <a:t>12</a:t>
+            </a:fld>
+            <a:endParaRPr lang="en-US"/>
+          </a:p>
+        </p:txBody>
+      </p:sp>
+    </p:spTree>
+    <p:extLst>
+      <p:ext uri="{BB962C8B-B14F-4D97-AF65-F5344CB8AC3E}">
+        <p14:creationId xmlns:p14="http://schemas.microsoft.com/office/powerpoint/2010/main" val="1024086991"/>
+      </p:ext>
+    </p:extLst>
+  </p:cSld>
+  <p:clrMapOvr>
+    <a:masterClrMapping/>
+  </p:clrMapOvr>
+</p:notes>
+</file>
+
+<file path=ppt/notesSlides/notesSlide13.xml><?xml version="1.0" encoding="utf-8"?>
+<p:notes xmlns:a="http://schemas.openxmlformats.org/drawingml/2006/main" xmlns:r="http://schemas.openxmlformats.org/officeDocument/2006/relationships" xmlns:p="http://schemas.openxmlformats.org/presentationml/2006/main">
+  <p:cSld>
+    <p:spTree>
+      <p:nvGrpSpPr>
+        <p:cNvPr id="1" name=""/>
+        <p:cNvGrpSpPr/>
+        <p:nvPr/>
+      </p:nvGrpSpPr>
+      <p:grpSpPr>
+        <a:xfrm>
+          <a:off x="0" y="0"/>
+          <a:ext cx="0" cy="0"/>
+          <a:chOff x="0" y="0"/>
+          <a:chExt cx="0" cy="0"/>
+        </a:xfrm>
+      </p:grpSpPr>
+      <p:sp>
+        <p:nvSpPr>
+          <p:cNvPr id="2" name="Slide Image Placeholder 1"/>
+          <p:cNvSpPr>
+            <a:spLocks noGrp="1" noRot="1" noChangeAspect="1"/>
+          </p:cNvSpPr>
+          <p:nvPr>
+            <p:ph type="sldImg"/>
+          </p:nvPr>
+        </p:nvSpPr>
+        <p:spPr/>
+      </p:sp>
+      <p:sp>
+        <p:nvSpPr>
+          <p:cNvPr id="3" name="Notes Placeholder 2"/>
+          <p:cNvSpPr>
+            <a:spLocks noGrp="1"/>
+          </p:cNvSpPr>
+          <p:nvPr>
+            <p:ph type="body" idx="1"/>
+          </p:nvPr>
+        </p:nvSpPr>
+        <p:spPr/>
+        <p:txBody>
+          <a:bodyPr/>
+          <a:lstStyle/>
+          <a:p>
+            <a:r>
+              <a:rPr lang="en-US" dirty="0"/>
+              <a:t/>
+            </a:r>
+            <a:endParaRPr lang="en-US" dirty="0"/>
+          </a:p>
+        </p:txBody>
+      </p:sp>
+      <p:sp>
+        <p:nvSpPr>
+          <p:cNvPr id="4" name="Slide Number Placeholder 3"/>
+          <p:cNvSpPr>
+            <a:spLocks noGrp="1"/>
+          </p:cNvSpPr>
+          <p:nvPr>
+            <p:ph type="sldNum" sz="quarter" idx="10"/>
+          </p:nvPr>
+        </p:nvSpPr>
+        <p:spPr/>
+        <p:txBody>
+          <a:bodyPr/>
+          <a:lstStyle/>
+          <a:p>
+            <a:fld id="{F7021451-1387-4CA6-816F-3879F97B5CBC}" type="slidenum">
+              <a:rPr lang="en-US"/>
+              <a:t>13</a:t>
+            </a:fld>
+            <a:endParaRPr lang="en-US"/>
+          </a:p>
+        </p:txBody>
+      </p:sp>
+    </p:spTree>
+    <p:extLst>
+      <p:ext uri="{BB962C8B-B14F-4D97-AF65-F5344CB8AC3E}">
+        <p14:creationId xmlns:p14="http://schemas.microsoft.com/office/powerpoint/2010/main" val="1024086991"/>
+      </p:ext>
+    </p:extLst>
+  </p:cSld>
+  <p:clrMapOvr>
+    <a:masterClrMapping/>
+  </p:clrMapOvr>
+</p:notes>
+</file>
+
+<file path=ppt/notesSlides/notesSlide14.xml><?xml version="1.0" encoding="utf-8"?>
+<p:notes xmlns:a="http://schemas.openxmlformats.org/drawingml/2006/main" xmlns:r="http://schemas.openxmlformats.org/officeDocument/2006/relationships" xmlns:p="http://schemas.openxmlformats.org/presentationml/2006/main">
+  <p:cSld>
+    <p:spTree>
+      <p:nvGrpSpPr>
+        <p:cNvPr id="1" name=""/>
+        <p:cNvGrpSpPr/>
+        <p:nvPr/>
+      </p:nvGrpSpPr>
+      <p:grpSpPr>
+        <a:xfrm>
+          <a:off x="0" y="0"/>
+          <a:ext cx="0" cy="0"/>
+          <a:chOff x="0" y="0"/>
+          <a:chExt cx="0" cy="0"/>
+        </a:xfrm>
+      </p:grpSpPr>
+      <p:sp>
+        <p:nvSpPr>
+          <p:cNvPr id="2" name="Slide Image Placeholder 1"/>
+          <p:cNvSpPr>
+            <a:spLocks noGrp="1" noRot="1" noChangeAspect="1"/>
+          </p:cNvSpPr>
+          <p:nvPr>
+            <p:ph type="sldImg"/>
+          </p:nvPr>
+        </p:nvSpPr>
+        <p:spPr/>
+      </p:sp>
+      <p:sp>
+        <p:nvSpPr>
+          <p:cNvPr id="3" name="Notes Placeholder 2"/>
+          <p:cNvSpPr>
+            <a:spLocks noGrp="1"/>
+          </p:cNvSpPr>
+          <p:nvPr>
+            <p:ph type="body" idx="1"/>
+          </p:nvPr>
+        </p:nvSpPr>
+        <p:spPr/>
+        <p:txBody>
+          <a:bodyPr/>
+          <a:lstStyle/>
+          <a:p>
+            <a:r>
+              <a:rPr lang="en-US" dirty="0"/>
+              <a:t/>
+            </a:r>
+            <a:endParaRPr lang="en-US" dirty="0"/>
+          </a:p>
+        </p:txBody>
+      </p:sp>
+      <p:sp>
+        <p:nvSpPr>
+          <p:cNvPr id="4" name="Slide Number Placeholder 3"/>
+          <p:cNvSpPr>
+            <a:spLocks noGrp="1"/>
+          </p:cNvSpPr>
+          <p:nvPr>
+            <p:ph type="sldNum" sz="quarter" idx="10"/>
+          </p:nvPr>
+        </p:nvSpPr>
+        <p:spPr/>
+        <p:txBody>
+          <a:bodyPr/>
+          <a:lstStyle/>
+          <a:p>
+            <a:fld id="{F7021451-1387-4CA6-816F-3879F97B5CBC}" type="slidenum">
+              <a:rPr lang="en-US"/>
+              <a:t>14</a:t>
             </a:fld>
             <a:endParaRPr lang="en-US"/>
           </a:p>
@@ -2011,102 +2278,6 @@
         </p:nvSpPr>
         <p:spPr>
           <a:xfrm>
-            <a:off x="406301" y="1223963"/>
-            <a:ext cx="8498026" cy="274290"/>
-          </a:xfrm>
-          <a:prstGeom prst="rect">
-            <a:avLst/>
-          </a:prstGeom>
-          <a:noFill/>
-          <a:ln/>
-        </p:spPr>
-        <p:txBody>
-          <a:bodyPr wrap="square" lIns="0" tIns="0" rIns="0" bIns="0" rtlCol="0" anchor="t"/>
-          <a:lstStyle/>
-          <a:p>
-            <a:pPr algn="l" indent="0" marL="0">
-              <a:lnSpc>
-                <a:spcPts val="2160"/>
-              </a:lnSpc>
-              <a:spcBef>
-                <a:spcPts val="600"/>
-              </a:spcBef>
-              <a:spcAft>
-                <a:spcPts val="800"/>
-              </a:spcAft>
-              <a:buNone/>
-            </a:pPr>
-            <a:r>
-              <a:rPr lang="en-US" sz="1800" b="1" dirty="0">
-                <a:solidFill>
-                  <a:srgbClr val="997929"/>
-                </a:solidFill>
-                <a:latin typeface="Times New Roman" pitchFamily="34" charset="0"/>
-                <a:ea typeface="Times New Roman" pitchFamily="34" charset="-122"/>
-                <a:cs typeface="Times New Roman" pitchFamily="34" charset="-120"/>
-              </a:rPr>
-              <a:t>Learning objective</a:t>
-            </a:r>
-            <a:endParaRPr lang="en-US" sz="1800" dirty="0"/>
-          </a:p>
-        </p:txBody>
-      </p:sp>
-      <p:sp>
-        <p:nvSpPr>
-          <p:cNvPr id="6" name="Text 4"/>
-          <p:cNvSpPr/>
-          <p:nvPr/>
-        </p:nvSpPr>
-        <p:spPr>
-          <a:xfrm>
-            <a:off x="406301" y="1637854"/>
-            <a:ext cx="8498026" cy="213271"/>
-          </a:xfrm>
-          <a:prstGeom prst="rect">
-            <a:avLst/>
-          </a:prstGeom>
-          <a:noFill/>
-          <a:ln/>
-        </p:spPr>
-        <p:txBody>
-          <a:bodyPr wrap="square" lIns="0" tIns="0" rIns="0" bIns="0" rtlCol="0" anchor="t"/>
-          <a:lstStyle/>
-          <a:p>
-            <a:pPr algn="l" indent="0" marL="0">
-              <a:lnSpc>
-                <a:spcPts val="1680"/>
-              </a:lnSpc>
-              <a:spcBef>
-                <a:spcPts val="300"/>
-              </a:spcBef>
-              <a:spcAft>
-                <a:spcPts val="300"/>
-              </a:spcAft>
-              <a:buNone/>
-            </a:pPr>
-            <a:r>
-              <a:rPr lang="en-US" sz="1200" dirty="0">
-                <a:solidFill>
-                  <a:srgbClr val="1A1A1A"/>
-                </a:solidFill>
-                <a:latin typeface="Georgia" pitchFamily="34" charset="0"/>
-                <a:ea typeface="Georgia" pitchFamily="34" charset="-122"/>
-                <a:cs typeface="Georgia" pitchFamily="34" charset="-120"/>
-              </a:rPr>
-              <a:t>By the end of this lesson, students will: identify tulasī by leaf and smell; name the active compound (eugenol).</a:t>
-            </a:r>
-            <a:endParaRPr lang="en-US" sz="1200" dirty="0"/>
-          </a:p>
-        </p:txBody>
-      </p:sp>
-      <p:sp>
-        <p:nvSpPr>
-          <p:cNvPr id="7" name="Text 5"/>
-          <p:cNvSpPr/>
-          <p:nvPr/>
-        </p:nvSpPr>
-        <p:spPr>
-          <a:xfrm>
             <a:off x="406301" y="4434929"/>
             <a:ext cx="8498026" cy="213271"/>
           </a:xfrm>
@@ -2251,7 +2422,7 @@
                 <a:ea typeface="Times New Roman" pitchFamily="34" charset="-122"/>
                 <a:cs typeface="Times New Roman" pitchFamily="34" charset="-120"/>
               </a:rPr>
-              <a:t>Differentiation</a:t>
+              <a:t>Activity (15 min)</a:t>
             </a:r>
             <a:endParaRPr lang="en-US" sz="1800" dirty="0"/>
           </a:p>
@@ -2265,8 +2436,8 @@
         </p:nvSpPr>
         <p:spPr>
           <a:xfrm>
-            <a:off x="634901" y="883593"/>
-            <a:ext cx="8102798" cy="525661"/>
+            <a:off x="406301" y="870942"/>
+            <a:ext cx="8498026" cy="436066"/>
           </a:xfrm>
           <a:prstGeom prst="rect">
             <a:avLst/>
@@ -2278,31 +2449,13 @@
           <a:bodyPr wrap="square" lIns="0" tIns="0" rIns="0" bIns="0" rtlCol="0" anchor="t"/>
           <a:lstStyle/>
           <a:p>
-            <a:pPr algn="l" marL="342900" indent="-342900">
-              <a:lnSpc>
-                <a:spcPts val="1620"/>
-              </a:lnSpc>
-              <a:spcAft>
-                <a:spcPts val="300"/>
-              </a:spcAft>
-              <a:buSzPct val="100000"/>
-              <a:buChar char="•"/>
-            </a:pPr>
-            <a:r>
-              <a:rPr lang="en-US" sz="1200" b="1" dirty="0">
-                <a:solidFill>
-                  <a:srgbClr val="1A1A1A"/>
-                </a:solidFill>
-                <a:latin typeface="Georgia" pitchFamily="34" charset="0"/>
-                <a:ea typeface="Georgia" pitchFamily="34" charset="-122"/>
-                <a:cs typeface="Georgia" pitchFamily="34" charset="-120"/>
-              </a:rPr>
-              <a:t>Extension:</a:t>
-            </a:r>
-            <a:pPr algn="l" indent="0" marL="0">
-              <a:lnSpc>
-                <a:spcPts val="1620"/>
-              </a:lnSpc>
+            <a:pPr algn="l" indent="0" marL="0">
+              <a:lnSpc>
+                <a:spcPts val="1680"/>
+              </a:lnSpc>
+              <a:spcBef>
+                <a:spcPts val="300"/>
+              </a:spcBef>
               <a:spcAft>
                 <a:spcPts val="300"/>
               </a:spcAft>
@@ -2317,36 +2470,38 @@
                 <a:ea typeface="Georgia" pitchFamily="34" charset="-122"/>
                 <a:cs typeface="Georgia" pitchFamily="34" charset="-120"/>
               </a:rPr>
-              <a:t> offer one open question or extra problem for fast finishers.</a:t>
-            </a:r>
-            <a:endParaRPr lang="en-US" sz="1200" dirty="0"/>
-          </a:p>
-          <a:p>
-            <a:pPr algn="l" marL="342900" indent="-342900">
-              <a:lnSpc>
-                <a:spcPts val="1620"/>
-              </a:lnSpc>
-              <a:spcAft>
-                <a:spcPts val="300"/>
-              </a:spcAft>
-              <a:buSzPct val="100000"/>
-              <a:buChar char="•"/>
-            </a:pPr>
-            <a:r>
-              <a:rPr lang="en-US" sz="1200" b="1" dirty="0">
-                <a:solidFill>
-                  <a:srgbClr val="1A1A1A"/>
-                </a:solidFill>
-                <a:latin typeface="Georgia" pitchFamily="34" charset="0"/>
-                <a:ea typeface="Georgia" pitchFamily="34" charset="-122"/>
-                <a:cs typeface="Georgia" pitchFamily="34" charset="-120"/>
-              </a:rPr>
-              <a:t>Support:</a:t>
-            </a:r>
-            <a:pPr algn="l" indent="0" marL="0">
-              <a:lnSpc>
-                <a:spcPts val="1620"/>
-              </a:lnSpc>
+              <a:t>A scaled version of </a:t>
+            </a:r>
+            <a:pPr algn="l" indent="0" marL="0">
+              <a:lnSpc>
+                <a:spcPts val="1680"/>
+              </a:lnSpc>
+              <a:spcBef>
+                <a:spcPts val="300"/>
+              </a:spcBef>
+              <a:spcAft>
+                <a:spcPts val="300"/>
+              </a:spcAft>
+              <a:buNone/>
+            </a:pPr>
+            <a:r>
+              <a:rPr lang="en-US" sz="1200" i="1" dirty="0">
+                <a:solidFill>
+                  <a:srgbClr val="1A1A1A"/>
+                </a:solidFill>
+                <a:latin typeface="Georgia" pitchFamily="34" charset="0"/>
+                <a:ea typeface="Georgia" pitchFamily="34" charset="-122"/>
+                <a:cs typeface="Georgia" pitchFamily="34" charset="-120"/>
+              </a:rPr>
+              <a:t>Blind Smell-Test Identification</a:t>
+            </a:r>
+            <a:pPr algn="l" indent="0" marL="0">
+              <a:lnSpc>
+                <a:spcPts val="1680"/>
+              </a:lnSpc>
+              <a:spcBef>
+                <a:spcPts val="300"/>
+              </a:spcBef>
               <a:spcAft>
                 <a:spcPts val="300"/>
               </a:spcAft>
@@ -2361,7 +2516,53 @@
                 <a:ea typeface="Georgia" pitchFamily="34" charset="-122"/>
                 <a:cs typeface="Georgia" pitchFamily="34" charset="-120"/>
               </a:rPr>
-              <a:t> pair students who need scaffolds; offer partial outlines.</a:t>
+              <a:t> (see </a:t>
+            </a:r>
+            <a:pPr algn="l" indent="0" marL="0">
+              <a:lnSpc>
+                <a:spcPts val="1680"/>
+              </a:lnSpc>
+              <a:spcBef>
+                <a:spcPts val="300"/>
+              </a:spcBef>
+              <a:spcAft>
+                <a:spcPts val="300"/>
+              </a:spcAft>
+              <a:buNone/>
+            </a:pPr>
+            <a:r>
+              <a:rPr lang="en-US" sz="1200" dirty="0">
+                <a:solidFill>
+                  <a:srgbClr val="1A1A1A"/>
+                </a:solidFill>
+                <a:latin typeface="Georgia" pitchFamily="34" charset="0"/>
+                <a:ea typeface="Georgia" pitchFamily="34" charset="-122"/>
+                <a:cs typeface="Georgia" pitchFamily="34" charset="-120"/>
+              </a:rPr>
+              <a:t>activities/</a:t>
+            </a:r>
+            <a:pPr algn="l" indent="0" marL="0">
+              <a:lnSpc>
+                <a:spcPts val="1680"/>
+              </a:lnSpc>
+              <a:spcBef>
+                <a:spcPts val="300"/>
+              </a:spcBef>
+              <a:spcAft>
+                <a:spcPts val="300"/>
+              </a:spcAft>
+              <a:buNone/>
+            </a:pPr>
+            <a:r>
+              <a:rPr lang="en-US" sz="1200" dirty="0">
+                <a:solidFill>
+                  <a:srgbClr val="1A1A1A"/>
+                </a:solidFill>
+                <a:latin typeface="Georgia" pitchFamily="34" charset="0"/>
+                <a:ea typeface="Georgia" pitchFamily="34" charset="-122"/>
+                <a:cs typeface="Georgia" pitchFamily="34" charset="-120"/>
+              </a:rPr>
+              <a:t>). Today's slice: focus on the part of the activity that reinforces Tulsī — Holy Basil.</a:t>
             </a:r>
             <a:endParaRPr lang="en-US" sz="1200" dirty="0"/>
           </a:p>
@@ -2519,7 +2720,7 @@
                 <a:ea typeface="Times New Roman" pitchFamily="34" charset="-122"/>
                 <a:cs typeface="Times New Roman" pitchFamily="34" charset="-120"/>
               </a:rPr>
-              <a:t>Teacher notes</a:t>
+              <a:t>Wrap-up (5 min)</a:t>
             </a:r>
             <a:endParaRPr lang="en-US" sz="1800" dirty="0"/>
           </a:p>
@@ -2533,8 +2734,8 @@
         </p:nvSpPr>
         <p:spPr>
           <a:xfrm>
-            <a:off x="406301" y="870942"/>
-            <a:ext cx="8498026" cy="426541"/>
+            <a:off x="634901" y="883593"/>
+            <a:ext cx="8102798" cy="525661"/>
           </a:xfrm>
           <a:prstGeom prst="rect">
             <a:avLst/>
@@ -2546,6 +2747,96 @@
           <a:bodyPr wrap="square" lIns="0" tIns="0" rIns="0" bIns="0" rtlCol="0" anchor="t"/>
           <a:lstStyle/>
           <a:p>
+            <a:pPr algn="l" marL="342900" indent="-342900">
+              <a:lnSpc>
+                <a:spcPts val="1620"/>
+              </a:lnSpc>
+              <a:spcAft>
+                <a:spcPts val="300"/>
+              </a:spcAft>
+              <a:buSzPct val="100000"/>
+              <a:buChar char="•"/>
+            </a:pPr>
+            <a:r>
+              <a:rPr lang="en-US" sz="1200" dirty="0">
+                <a:solidFill>
+                  <a:srgbClr val="1A1A1A"/>
+                </a:solidFill>
+                <a:latin typeface="Georgia" pitchFamily="34" charset="0"/>
+                <a:ea typeface="Georgia" pitchFamily="34" charset="-122"/>
+                <a:cs typeface="Georgia" pitchFamily="34" charset="-120"/>
+              </a:rPr>
+              <a:t>One-sentence exit ticket: </a:t>
+            </a:r>
+            <a:pPr algn="l" indent="0" marL="0">
+              <a:lnSpc>
+                <a:spcPts val="1620"/>
+              </a:lnSpc>
+              <a:spcAft>
+                <a:spcPts val="300"/>
+              </a:spcAft>
+              <a:buNone/>
+            </a:pPr>
+            <a:r>
+              <a:rPr lang="en-US" sz="1200" i="1" dirty="0">
+                <a:solidFill>
+                  <a:srgbClr val="1A1A1A"/>
+                </a:solidFill>
+                <a:latin typeface="Georgia" pitchFamily="34" charset="0"/>
+                <a:ea typeface="Georgia" pitchFamily="34" charset="-122"/>
+                <a:cs typeface="Georgia" pitchFamily="34" charset="-120"/>
+              </a:rPr>
+              <a:t>"What's one thing you learned today?"</a:t>
+            </a:r>
+            <a:endParaRPr lang="en-US" sz="1200" dirty="0"/>
+          </a:p>
+          <a:p>
+            <a:pPr algn="l" marL="342900" indent="-342900">
+              <a:lnSpc>
+                <a:spcPts val="1620"/>
+              </a:lnSpc>
+              <a:spcAft>
+                <a:spcPts val="300"/>
+              </a:spcAft>
+              <a:buSzPct val="100000"/>
+              <a:buChar char="•"/>
+            </a:pPr>
+            <a:r>
+              <a:rPr lang="en-US" sz="1200" dirty="0">
+                <a:solidFill>
+                  <a:srgbClr val="1A1A1A"/>
+                </a:solidFill>
+                <a:latin typeface="Georgia" pitchFamily="34" charset="0"/>
+                <a:ea typeface="Georgia" pitchFamily="34" charset="-122"/>
+                <a:cs typeface="Georgia" pitchFamily="34" charset="-120"/>
+              </a:rPr>
+              <a:t>Preview tomorrow.</a:t>
+            </a:r>
+            <a:endParaRPr lang="en-US" sz="1200" dirty="0"/>
+          </a:p>
+        </p:txBody>
+      </p:sp>
+      <p:sp>
+        <p:nvSpPr>
+          <p:cNvPr id="5" name="Text 3"/>
+          <p:cNvSpPr/>
+          <p:nvPr/>
+        </p:nvSpPr>
+        <p:spPr>
+          <a:xfrm>
+            <a:off x="406301" y="4434929"/>
+            <a:ext cx="8498026" cy="213271"/>
+          </a:xfrm>
+          <a:prstGeom prst="rect">
+            <a:avLst/>
+          </a:prstGeom>
+          <a:noFill/>
+          <a:ln/>
+        </p:spPr>
+        <p:txBody>
+          <a:bodyPr wrap="square" lIns="0" tIns="0" rIns="0" bIns="0" rtlCol="0" anchor="t"/>
+          <a:lstStyle/>
+          <a:p>
             <a:pPr algn="l" indent="0" marL="0">
               <a:lnSpc>
                 <a:spcPts val="1680"/>
@@ -2567,7 +2858,707 @@
                 <a:ea typeface="Georgia" pitchFamily="34" charset="-122"/>
                 <a:cs typeface="Georgia" pitchFamily="34" charset="-120"/>
               </a:rPr>
-              <a:t>– Citations: at least one quoted verse with citation per module. Day 1 already includes one if applicable; you may add more. – Connect to prior modules where natural (especially Module 2 pañcabhūta).</a:t>
+              <a:t>Senior ·  · IKS Curriculum</a:t>
+            </a:r>
+            <a:endParaRPr lang="en-US" sz="1200" dirty="0"/>
+          </a:p>
+        </p:txBody>
+      </p:sp>
+    </p:spTree>
+  </p:cSld>
+  <p:clrMapOvr>
+    <a:masterClrMapping/>
+  </p:clrMapOvr>
+</p:sld>
+</file>
+
+<file path=ppt/slides/slide12.xml><?xml version="1.0" encoding="utf-8"?>
+<p:sld xmlns:a="http://schemas.openxmlformats.org/drawingml/2006/main" xmlns:r="http://schemas.openxmlformats.org/officeDocument/2006/relationships" xmlns:p="http://schemas.openxmlformats.org/presentationml/2006/main">
+  <p:cSld name="Slide 12">
+    <p:bg>
+      <p:bgPr>
+        <a:solidFill>
+          <a:srgbClr val="FAF7F2"/>
+        </a:solidFill>
+      </p:bgPr>
+    </p:bg>
+    <p:spTree>
+      <p:nvGrpSpPr>
+        <p:cNvPr id="1" name=""/>
+        <p:cNvGrpSpPr/>
+        <p:nvPr/>
+      </p:nvGrpSpPr>
+      <p:grpSpPr>
+        <a:xfrm>
+          <a:off x="0" y="0"/>
+          <a:ext cx="0" cy="0"/>
+          <a:chOff x="0" y="0"/>
+          <a:chExt cx="0" cy="0"/>
+        </a:xfrm>
+      </p:grpSpPr>
+      <p:sp>
+        <p:nvSpPr>
+          <p:cNvPr id="2" name="Text 0"/>
+          <p:cNvSpPr/>
+          <p:nvPr/>
+        </p:nvSpPr>
+        <p:spPr>
+          <a:xfrm>
+            <a:off x="0" y="0"/>
+            <a:ext cx="9144000" cy="101501"/>
+          </a:xfrm>
+          <a:prstGeom prst="rect">
+            <a:avLst/>
+          </a:prstGeom>
+          <a:solidFill>
+            <a:srgbClr val="5D1D2E"/>
+          </a:solidFill>
+          <a:ln/>
+        </p:spPr>
+        <p:txBody>
+          <a:bodyPr wrap="square" rtlCol="0" anchor="ctr"/>
+          <a:lstStyle/>
+          <a:p>
+            <a:pPr indent="0" marL="0">
+              <a:buNone/>
+            </a:pPr>
+            <a:endParaRPr lang="en-US" dirty="0"/>
+          </a:p>
+        </p:txBody>
+      </p:sp>
+      <p:sp>
+        <p:nvSpPr>
+          <p:cNvPr id="3" name="Text 1"/>
+          <p:cNvSpPr/>
+          <p:nvPr/>
+        </p:nvSpPr>
+        <p:spPr>
+          <a:xfrm>
+            <a:off x="406301" y="457051"/>
+            <a:ext cx="8498026" cy="274290"/>
+          </a:xfrm>
+          <a:prstGeom prst="rect">
+            <a:avLst/>
+          </a:prstGeom>
+          <a:noFill/>
+          <a:ln/>
+        </p:spPr>
+        <p:txBody>
+          <a:bodyPr wrap="square" lIns="0" tIns="0" rIns="0" bIns="0" rtlCol="0" anchor="t"/>
+          <a:lstStyle/>
+          <a:p>
+            <a:pPr algn="l" indent="0" marL="0">
+              <a:lnSpc>
+                <a:spcPts val="2160"/>
+              </a:lnSpc>
+              <a:spcBef>
+                <a:spcPts val="600"/>
+              </a:spcBef>
+              <a:spcAft>
+                <a:spcPts val="800"/>
+              </a:spcAft>
+              <a:buNone/>
+            </a:pPr>
+            <a:r>
+              <a:rPr lang="en-US" sz="1800" b="1" dirty="0">
+                <a:solidFill>
+                  <a:srgbClr val="997929"/>
+                </a:solidFill>
+                <a:latin typeface="Times New Roman" pitchFamily="34" charset="0"/>
+                <a:ea typeface="Times New Roman" pitchFamily="34" charset="-122"/>
+                <a:cs typeface="Times New Roman" pitchFamily="34" charset="-120"/>
+              </a:rPr>
+              <a:t>Homework</a:t>
+            </a:r>
+            <a:endParaRPr lang="en-US" sz="1800" dirty="0"/>
+          </a:p>
+        </p:txBody>
+      </p:sp>
+      <p:sp>
+        <p:nvSpPr>
+          <p:cNvPr id="4" name="Text 2"/>
+          <p:cNvSpPr/>
+          <p:nvPr/>
+        </p:nvSpPr>
+        <p:spPr>
+          <a:xfrm>
+            <a:off x="406301" y="870942"/>
+            <a:ext cx="8498026" cy="222796"/>
+          </a:xfrm>
+          <a:prstGeom prst="rect">
+            <a:avLst/>
+          </a:prstGeom>
+          <a:noFill/>
+          <a:ln/>
+        </p:spPr>
+        <p:txBody>
+          <a:bodyPr wrap="square" lIns="0" tIns="0" rIns="0" bIns="0" rtlCol="0" anchor="t"/>
+          <a:lstStyle/>
+          <a:p>
+            <a:pPr algn="l" indent="0" marL="0">
+              <a:lnSpc>
+                <a:spcPts val="1680"/>
+              </a:lnSpc>
+              <a:spcBef>
+                <a:spcPts val="300"/>
+              </a:spcBef>
+              <a:spcAft>
+                <a:spcPts val="300"/>
+              </a:spcAft>
+              <a:buNone/>
+            </a:pPr>
+            <a:r>
+              <a:rPr lang="en-US" sz="1200" dirty="0">
+                <a:solidFill>
+                  <a:srgbClr val="1A1A1A"/>
+                </a:solidFill>
+                <a:latin typeface="Georgia" pitchFamily="34" charset="0"/>
+                <a:ea typeface="Georgia" pitchFamily="34" charset="-122"/>
+                <a:cs typeface="Georgia" pitchFamily="34" charset="-120"/>
+              </a:rPr>
+              <a:t>(See </a:t>
+            </a:r>
+            <a:pPr algn="l" indent="0" marL="0">
+              <a:lnSpc>
+                <a:spcPts val="1680"/>
+              </a:lnSpc>
+              <a:spcBef>
+                <a:spcPts val="300"/>
+              </a:spcBef>
+              <a:spcAft>
+                <a:spcPts val="300"/>
+              </a:spcAft>
+              <a:buNone/>
+            </a:pPr>
+            <a:r>
+              <a:rPr lang="en-US" sz="1200" dirty="0">
+                <a:solidFill>
+                  <a:srgbClr val="1A1A1A"/>
+                </a:solidFill>
+                <a:latin typeface="Georgia" pitchFamily="34" charset="0"/>
+                <a:ea typeface="Georgia" pitchFamily="34" charset="-122"/>
+                <a:cs typeface="Georgia" pitchFamily="34" charset="-120"/>
+              </a:rPr>
+              <a:t>homework.md</a:t>
+            </a:r>
+            <a:pPr algn="l" indent="0" marL="0">
+              <a:lnSpc>
+                <a:spcPts val="1680"/>
+              </a:lnSpc>
+              <a:spcBef>
+                <a:spcPts val="300"/>
+              </a:spcBef>
+              <a:spcAft>
+                <a:spcPts val="300"/>
+              </a:spcAft>
+              <a:buNone/>
+            </a:pPr>
+            <a:r>
+              <a:rPr lang="en-US" sz="1200" dirty="0">
+                <a:solidFill>
+                  <a:srgbClr val="1A1A1A"/>
+                </a:solidFill>
+                <a:latin typeface="Georgia" pitchFamily="34" charset="0"/>
+                <a:ea typeface="Georgia" pitchFamily="34" charset="-122"/>
+                <a:cs typeface="Georgia" pitchFamily="34" charset="-120"/>
+              </a:rPr>
+              <a:t> for today's task.)</a:t>
+            </a:r>
+            <a:endParaRPr lang="en-US" sz="1200" dirty="0"/>
+          </a:p>
+        </p:txBody>
+      </p:sp>
+      <p:sp>
+        <p:nvSpPr>
+          <p:cNvPr id="5" name="Text 3"/>
+          <p:cNvSpPr/>
+          <p:nvPr/>
+        </p:nvSpPr>
+        <p:spPr>
+          <a:xfrm>
+            <a:off x="406301" y="4434929"/>
+            <a:ext cx="8498026" cy="213271"/>
+          </a:xfrm>
+          <a:prstGeom prst="rect">
+            <a:avLst/>
+          </a:prstGeom>
+          <a:noFill/>
+          <a:ln/>
+        </p:spPr>
+        <p:txBody>
+          <a:bodyPr wrap="square" lIns="0" tIns="0" rIns="0" bIns="0" rtlCol="0" anchor="t"/>
+          <a:lstStyle/>
+          <a:p>
+            <a:pPr algn="l" indent="0" marL="0">
+              <a:lnSpc>
+                <a:spcPts val="1680"/>
+              </a:lnSpc>
+              <a:spcBef>
+                <a:spcPts val="300"/>
+              </a:spcBef>
+              <a:spcAft>
+                <a:spcPts val="300"/>
+              </a:spcAft>
+              <a:buNone/>
+            </a:pPr>
+            <a:r>
+              <a:rPr lang="en-US" sz="1200" dirty="0">
+                <a:solidFill>
+                  <a:srgbClr val="1A1A1A"/>
+                </a:solidFill>
+                <a:latin typeface="Georgia" pitchFamily="34" charset="0"/>
+                <a:ea typeface="Georgia" pitchFamily="34" charset="-122"/>
+                <a:cs typeface="Georgia" pitchFamily="34" charset="-120"/>
+              </a:rPr>
+              <a:t>Senior ·  · IKS Curriculum</a:t>
+            </a:r>
+            <a:endParaRPr lang="en-US" sz="1200" dirty="0"/>
+          </a:p>
+        </p:txBody>
+      </p:sp>
+    </p:spTree>
+  </p:cSld>
+  <p:clrMapOvr>
+    <a:masterClrMapping/>
+  </p:clrMapOvr>
+</p:sld>
+</file>
+
+<file path=ppt/slides/slide13.xml><?xml version="1.0" encoding="utf-8"?>
+<p:sld xmlns:a="http://schemas.openxmlformats.org/drawingml/2006/main" xmlns:r="http://schemas.openxmlformats.org/officeDocument/2006/relationships" xmlns:p="http://schemas.openxmlformats.org/presentationml/2006/main">
+  <p:cSld name="Slide 13">
+    <p:bg>
+      <p:bgPr>
+        <a:solidFill>
+          <a:srgbClr val="FAF7F2"/>
+        </a:solidFill>
+      </p:bgPr>
+    </p:bg>
+    <p:spTree>
+      <p:nvGrpSpPr>
+        <p:cNvPr id="1" name=""/>
+        <p:cNvGrpSpPr/>
+        <p:nvPr/>
+      </p:nvGrpSpPr>
+      <p:grpSpPr>
+        <a:xfrm>
+          <a:off x="0" y="0"/>
+          <a:ext cx="0" cy="0"/>
+          <a:chOff x="0" y="0"/>
+          <a:chExt cx="0" cy="0"/>
+        </a:xfrm>
+      </p:grpSpPr>
+      <p:sp>
+        <p:nvSpPr>
+          <p:cNvPr id="2" name="Text 0"/>
+          <p:cNvSpPr/>
+          <p:nvPr/>
+        </p:nvSpPr>
+        <p:spPr>
+          <a:xfrm>
+            <a:off x="0" y="0"/>
+            <a:ext cx="9144000" cy="101501"/>
+          </a:xfrm>
+          <a:prstGeom prst="rect">
+            <a:avLst/>
+          </a:prstGeom>
+          <a:solidFill>
+            <a:srgbClr val="5D1D2E"/>
+          </a:solidFill>
+          <a:ln/>
+        </p:spPr>
+        <p:txBody>
+          <a:bodyPr wrap="square" rtlCol="0" anchor="ctr"/>
+          <a:lstStyle/>
+          <a:p>
+            <a:pPr indent="0" marL="0">
+              <a:buNone/>
+            </a:pPr>
+            <a:endParaRPr lang="en-US" dirty="0"/>
+          </a:p>
+        </p:txBody>
+      </p:sp>
+      <p:sp>
+        <p:nvSpPr>
+          <p:cNvPr id="3" name="Text 1"/>
+          <p:cNvSpPr/>
+          <p:nvPr/>
+        </p:nvSpPr>
+        <p:spPr>
+          <a:xfrm>
+            <a:off x="406301" y="457051"/>
+            <a:ext cx="8498026" cy="274290"/>
+          </a:xfrm>
+          <a:prstGeom prst="rect">
+            <a:avLst/>
+          </a:prstGeom>
+          <a:noFill/>
+          <a:ln/>
+        </p:spPr>
+        <p:txBody>
+          <a:bodyPr wrap="square" lIns="0" tIns="0" rIns="0" bIns="0" rtlCol="0" anchor="t"/>
+          <a:lstStyle/>
+          <a:p>
+            <a:pPr algn="l" indent="0" marL="0">
+              <a:lnSpc>
+                <a:spcPts val="2160"/>
+              </a:lnSpc>
+              <a:spcBef>
+                <a:spcPts val="600"/>
+              </a:spcBef>
+              <a:spcAft>
+                <a:spcPts val="800"/>
+              </a:spcAft>
+              <a:buNone/>
+            </a:pPr>
+            <a:r>
+              <a:rPr lang="en-US" sz="1800" b="1" dirty="0">
+                <a:solidFill>
+                  <a:srgbClr val="997929"/>
+                </a:solidFill>
+                <a:latin typeface="Times New Roman" pitchFamily="34" charset="0"/>
+                <a:ea typeface="Times New Roman" pitchFamily="34" charset="-122"/>
+                <a:cs typeface="Times New Roman" pitchFamily="34" charset="-120"/>
+              </a:rPr>
+              <a:t>Differentiation</a:t>
+            </a:r>
+            <a:endParaRPr lang="en-US" sz="1800" dirty="0"/>
+          </a:p>
+        </p:txBody>
+      </p:sp>
+      <p:sp>
+        <p:nvSpPr>
+          <p:cNvPr id="4" name="Text 2"/>
+          <p:cNvSpPr/>
+          <p:nvPr/>
+        </p:nvSpPr>
+        <p:spPr>
+          <a:xfrm>
+            <a:off x="634901" y="883593"/>
+            <a:ext cx="8102798" cy="525661"/>
+          </a:xfrm>
+          <a:prstGeom prst="rect">
+            <a:avLst/>
+          </a:prstGeom>
+          <a:noFill/>
+          <a:ln/>
+        </p:spPr>
+        <p:txBody>
+          <a:bodyPr wrap="square" lIns="0" tIns="0" rIns="0" bIns="0" rtlCol="0" anchor="t"/>
+          <a:lstStyle/>
+          <a:p>
+            <a:pPr algn="l" marL="342900" indent="-342900">
+              <a:lnSpc>
+                <a:spcPts val="1620"/>
+              </a:lnSpc>
+              <a:spcAft>
+                <a:spcPts val="300"/>
+              </a:spcAft>
+              <a:buSzPct val="100000"/>
+              <a:buChar char="•"/>
+            </a:pPr>
+            <a:r>
+              <a:rPr lang="en-US" sz="1200" b="1" dirty="0">
+                <a:solidFill>
+                  <a:srgbClr val="1A1A1A"/>
+                </a:solidFill>
+                <a:latin typeface="Georgia" pitchFamily="34" charset="0"/>
+                <a:ea typeface="Georgia" pitchFamily="34" charset="-122"/>
+                <a:cs typeface="Georgia" pitchFamily="34" charset="-120"/>
+              </a:rPr>
+              <a:t>Extension:</a:t>
+            </a:r>
+            <a:pPr algn="l" indent="0" marL="0">
+              <a:lnSpc>
+                <a:spcPts val="1620"/>
+              </a:lnSpc>
+              <a:spcAft>
+                <a:spcPts val="300"/>
+              </a:spcAft>
+              <a:buNone/>
+            </a:pPr>
+            <a:r>
+              <a:rPr lang="en-US" sz="1200" dirty="0">
+                <a:solidFill>
+                  <a:srgbClr val="1A1A1A"/>
+                </a:solidFill>
+                <a:latin typeface="Georgia" pitchFamily="34" charset="0"/>
+                <a:ea typeface="Georgia" pitchFamily="34" charset="-122"/>
+                <a:cs typeface="Georgia" pitchFamily="34" charset="-120"/>
+              </a:rPr>
+              <a:t> offer one open question or extra problem for fast finishers.</a:t>
+            </a:r>
+            <a:endParaRPr lang="en-US" sz="1200" dirty="0"/>
+          </a:p>
+          <a:p>
+            <a:pPr algn="l" marL="342900" indent="-342900">
+              <a:lnSpc>
+                <a:spcPts val="1620"/>
+              </a:lnSpc>
+              <a:spcAft>
+                <a:spcPts val="300"/>
+              </a:spcAft>
+              <a:buSzPct val="100000"/>
+              <a:buChar char="•"/>
+            </a:pPr>
+            <a:r>
+              <a:rPr lang="en-US" sz="1200" b="1" dirty="0">
+                <a:solidFill>
+                  <a:srgbClr val="1A1A1A"/>
+                </a:solidFill>
+                <a:latin typeface="Georgia" pitchFamily="34" charset="0"/>
+                <a:ea typeface="Georgia" pitchFamily="34" charset="-122"/>
+                <a:cs typeface="Georgia" pitchFamily="34" charset="-120"/>
+              </a:rPr>
+              <a:t>Support:</a:t>
+            </a:r>
+            <a:pPr algn="l" indent="0" marL="0">
+              <a:lnSpc>
+                <a:spcPts val="1620"/>
+              </a:lnSpc>
+              <a:spcAft>
+                <a:spcPts val="300"/>
+              </a:spcAft>
+              <a:buNone/>
+            </a:pPr>
+            <a:r>
+              <a:rPr lang="en-US" sz="1200" dirty="0">
+                <a:solidFill>
+                  <a:srgbClr val="1A1A1A"/>
+                </a:solidFill>
+                <a:latin typeface="Georgia" pitchFamily="34" charset="0"/>
+                <a:ea typeface="Georgia" pitchFamily="34" charset="-122"/>
+                <a:cs typeface="Georgia" pitchFamily="34" charset="-120"/>
+              </a:rPr>
+              <a:t> pair students who need scaffolds; offer partial outlines.</a:t>
+            </a:r>
+            <a:endParaRPr lang="en-US" sz="1200" dirty="0"/>
+          </a:p>
+        </p:txBody>
+      </p:sp>
+      <p:sp>
+        <p:nvSpPr>
+          <p:cNvPr id="5" name="Text 3"/>
+          <p:cNvSpPr/>
+          <p:nvPr/>
+        </p:nvSpPr>
+        <p:spPr>
+          <a:xfrm>
+            <a:off x="406301" y="4434929"/>
+            <a:ext cx="8498026" cy="213271"/>
+          </a:xfrm>
+          <a:prstGeom prst="rect">
+            <a:avLst/>
+          </a:prstGeom>
+          <a:noFill/>
+          <a:ln/>
+        </p:spPr>
+        <p:txBody>
+          <a:bodyPr wrap="square" lIns="0" tIns="0" rIns="0" bIns="0" rtlCol="0" anchor="t"/>
+          <a:lstStyle/>
+          <a:p>
+            <a:pPr algn="l" indent="0" marL="0">
+              <a:lnSpc>
+                <a:spcPts val="1680"/>
+              </a:lnSpc>
+              <a:spcBef>
+                <a:spcPts val="300"/>
+              </a:spcBef>
+              <a:spcAft>
+                <a:spcPts val="300"/>
+              </a:spcAft>
+              <a:buNone/>
+            </a:pPr>
+            <a:r>
+              <a:rPr lang="en-US" sz="1200" dirty="0">
+                <a:solidFill>
+                  <a:srgbClr val="1A1A1A"/>
+                </a:solidFill>
+                <a:latin typeface="Georgia" pitchFamily="34" charset="0"/>
+                <a:ea typeface="Georgia" pitchFamily="34" charset="-122"/>
+                <a:cs typeface="Georgia" pitchFamily="34" charset="-120"/>
+              </a:rPr>
+              <a:t>Senior ·  · IKS Curriculum</a:t>
+            </a:r>
+            <a:endParaRPr lang="en-US" sz="1200" dirty="0"/>
+          </a:p>
+        </p:txBody>
+      </p:sp>
+    </p:spTree>
+  </p:cSld>
+  <p:clrMapOvr>
+    <a:masterClrMapping/>
+  </p:clrMapOvr>
+</p:sld>
+</file>
+
+<file path=ppt/slides/slide14.xml><?xml version="1.0" encoding="utf-8"?>
+<p:sld xmlns:a="http://schemas.openxmlformats.org/drawingml/2006/main" xmlns:r="http://schemas.openxmlformats.org/officeDocument/2006/relationships" xmlns:p="http://schemas.openxmlformats.org/presentationml/2006/main">
+  <p:cSld name="Slide 14">
+    <p:bg>
+      <p:bgPr>
+        <a:solidFill>
+          <a:srgbClr val="FAF7F2"/>
+        </a:solidFill>
+      </p:bgPr>
+    </p:bg>
+    <p:spTree>
+      <p:nvGrpSpPr>
+        <p:cNvPr id="1" name=""/>
+        <p:cNvGrpSpPr/>
+        <p:nvPr/>
+      </p:nvGrpSpPr>
+      <p:grpSpPr>
+        <a:xfrm>
+          <a:off x="0" y="0"/>
+          <a:ext cx="0" cy="0"/>
+          <a:chOff x="0" y="0"/>
+          <a:chExt cx="0" cy="0"/>
+        </a:xfrm>
+      </p:grpSpPr>
+      <p:sp>
+        <p:nvSpPr>
+          <p:cNvPr id="2" name="Text 0"/>
+          <p:cNvSpPr/>
+          <p:nvPr/>
+        </p:nvSpPr>
+        <p:spPr>
+          <a:xfrm>
+            <a:off x="0" y="0"/>
+            <a:ext cx="9144000" cy="101501"/>
+          </a:xfrm>
+          <a:prstGeom prst="rect">
+            <a:avLst/>
+          </a:prstGeom>
+          <a:solidFill>
+            <a:srgbClr val="5D1D2E"/>
+          </a:solidFill>
+          <a:ln/>
+        </p:spPr>
+        <p:txBody>
+          <a:bodyPr wrap="square" rtlCol="0" anchor="ctr"/>
+          <a:lstStyle/>
+          <a:p>
+            <a:pPr indent="0" marL="0">
+              <a:buNone/>
+            </a:pPr>
+            <a:endParaRPr lang="en-US" dirty="0"/>
+          </a:p>
+        </p:txBody>
+      </p:sp>
+      <p:sp>
+        <p:nvSpPr>
+          <p:cNvPr id="3" name="Text 1"/>
+          <p:cNvSpPr/>
+          <p:nvPr/>
+        </p:nvSpPr>
+        <p:spPr>
+          <a:xfrm>
+            <a:off x="406301" y="457051"/>
+            <a:ext cx="8498026" cy="274290"/>
+          </a:xfrm>
+          <a:prstGeom prst="rect">
+            <a:avLst/>
+          </a:prstGeom>
+          <a:noFill/>
+          <a:ln/>
+        </p:spPr>
+        <p:txBody>
+          <a:bodyPr wrap="square" lIns="0" tIns="0" rIns="0" bIns="0" rtlCol="0" anchor="t"/>
+          <a:lstStyle/>
+          <a:p>
+            <a:pPr algn="l" indent="0" marL="0">
+              <a:lnSpc>
+                <a:spcPts val="2160"/>
+              </a:lnSpc>
+              <a:spcBef>
+                <a:spcPts val="600"/>
+              </a:spcBef>
+              <a:spcAft>
+                <a:spcPts val="800"/>
+              </a:spcAft>
+              <a:buNone/>
+            </a:pPr>
+            <a:r>
+              <a:rPr lang="en-US" sz="1800" b="1" dirty="0">
+                <a:solidFill>
+                  <a:srgbClr val="997929"/>
+                </a:solidFill>
+                <a:latin typeface="Times New Roman" pitchFamily="34" charset="0"/>
+                <a:ea typeface="Times New Roman" pitchFamily="34" charset="-122"/>
+                <a:cs typeface="Times New Roman" pitchFamily="34" charset="-120"/>
+              </a:rPr>
+              <a:t>Teacher notes</a:t>
+            </a:r>
+            <a:endParaRPr lang="en-US" sz="1800" dirty="0"/>
+          </a:p>
+        </p:txBody>
+      </p:sp>
+      <p:sp>
+        <p:nvSpPr>
+          <p:cNvPr id="4" name="Text 2"/>
+          <p:cNvSpPr/>
+          <p:nvPr/>
+        </p:nvSpPr>
+        <p:spPr>
+          <a:xfrm>
+            <a:off x="634901" y="883593"/>
+            <a:ext cx="8102798" cy="731341"/>
+          </a:xfrm>
+          <a:prstGeom prst="rect">
+            <a:avLst/>
+          </a:prstGeom>
+          <a:noFill/>
+          <a:ln/>
+        </p:spPr>
+        <p:txBody>
+          <a:bodyPr wrap="square" lIns="0" tIns="0" rIns="0" bIns="0" rtlCol="0" anchor="t"/>
+          <a:lstStyle/>
+          <a:p>
+            <a:pPr algn="l" marL="342900" indent="-342900">
+              <a:lnSpc>
+                <a:spcPts val="1620"/>
+              </a:lnSpc>
+              <a:spcAft>
+                <a:spcPts val="300"/>
+              </a:spcAft>
+              <a:buSzPct val="100000"/>
+              <a:buChar char="•"/>
+            </a:pPr>
+            <a:r>
+              <a:rPr lang="en-US" sz="1200" dirty="0">
+                <a:solidFill>
+                  <a:srgbClr val="1A1A1A"/>
+                </a:solidFill>
+                <a:latin typeface="Georgia" pitchFamily="34" charset="0"/>
+                <a:ea typeface="Georgia" pitchFamily="34" charset="-122"/>
+                <a:cs typeface="Georgia" pitchFamily="34" charset="-120"/>
+              </a:rPr>
+              <a:t>Citations: at least one quoted verse with citation per module. Day 1 already includes one if applicable; you may add more.</a:t>
+            </a:r>
+            <a:endParaRPr lang="en-US" sz="1200" dirty="0"/>
+          </a:p>
+          <a:p>
+            <a:pPr algn="l" marL="342900" indent="-342900">
+              <a:lnSpc>
+                <a:spcPts val="1620"/>
+              </a:lnSpc>
+              <a:spcAft>
+                <a:spcPts val="300"/>
+              </a:spcAft>
+              <a:buSzPct val="100000"/>
+              <a:buChar char="•"/>
+            </a:pPr>
+            <a:r>
+              <a:rPr lang="en-US" sz="1200" dirty="0">
+                <a:solidFill>
+                  <a:srgbClr val="1A1A1A"/>
+                </a:solidFill>
+                <a:latin typeface="Georgia" pitchFamily="34" charset="0"/>
+                <a:ea typeface="Georgia" pitchFamily="34" charset="-122"/>
+                <a:cs typeface="Georgia" pitchFamily="34" charset="-120"/>
+              </a:rPr>
+              <a:t>Connect to prior modules where natural (especially Module 2 pañcabhūta).</a:t>
             </a:r>
             <a:endParaRPr lang="en-US" sz="1200" dirty="0"/>
           </a:p>
@@ -2725,7 +3716,7 @@
                 <a:ea typeface="Times New Roman" pitchFamily="34" charset="-122"/>
                 <a:cs typeface="Times New Roman" pitchFamily="34" charset="-120"/>
               </a:rPr>
-              <a:t>Materials</a:t>
+              <a:t>Learning objective</a:t>
             </a:r>
             <a:endParaRPr lang="en-US" sz="1800" dirty="0"/>
           </a:p>
@@ -2773,7 +3764,7 @@
                 <a:ea typeface="Georgia" pitchFamily="34" charset="-122"/>
                 <a:cs typeface="Georgia" pitchFamily="34" charset="-120"/>
               </a:rPr>
-              <a:t>– Whiteboard / chart paper – Notebook, pen per student</a:t>
+              <a:t>By the end of this lesson, students will: identify tulasī by leaf and smell; name the active compound (eugenol).</a:t>
             </a:r>
             <a:endParaRPr lang="en-US" sz="1200" dirty="0"/>
           </a:p>
@@ -2782,52 +3773,6 @@
       <p:sp>
         <p:nvSpPr>
           <p:cNvPr id="5" name="Text 3"/>
-          <p:cNvSpPr/>
-          <p:nvPr/>
-        </p:nvSpPr>
-        <p:spPr>
-          <a:xfrm>
-            <a:off x="634901" y="1173063"/>
-            <a:ext cx="8102798" cy="281880"/>
-          </a:xfrm>
-          <a:prstGeom prst="rect">
-            <a:avLst/>
-          </a:prstGeom>
-          <a:noFill/>
-          <a:ln/>
-        </p:spPr>
-        <p:txBody>
-          <a:bodyPr wrap="square" lIns="0" tIns="0" rIns="0" bIns="0" rtlCol="0" anchor="t"/>
-          <a:lstStyle/>
-          <a:p>
-            <a:pPr algn="l" marL="342900" indent="-342900">
-              <a:lnSpc>
-                <a:spcPts val="1620"/>
-              </a:lnSpc>
-              <a:spcAft>
-                <a:spcPts val="300"/>
-              </a:spcAft>
-              <a:buSzPct val="100000"/>
-              <a:buChar char="•"/>
-            </a:pPr>
-            <a:r>
-              <a:rPr lang="en-US" sz="1200" dirty="0">
-                <a:solidFill>
-                  <a:srgbClr val="1A1A1A"/>
-                </a:solidFill>
-                <a:latin typeface="Georgia" pitchFamily="34" charset="0"/>
-                <a:ea typeface="Georgia" pitchFamily="34" charset="-122"/>
-                <a:cs typeface="Georgia" pitchFamily="34" charset="-120"/>
-              </a:rPr>
-              <a:t>(See lesson-plan.md for any day-specific materials)</a:t>
-            </a:r>
-            <a:endParaRPr lang="en-US" sz="1200" dirty="0"/>
-          </a:p>
-        </p:txBody>
-      </p:sp>
-      <p:sp>
-        <p:nvSpPr>
-          <p:cNvPr id="6" name="Text 4"/>
           <p:cNvSpPr/>
           <p:nvPr/>
         </p:nvSpPr>
@@ -2977,7 +3922,7 @@
                 <a:ea typeface="Times New Roman" pitchFamily="34" charset="-122"/>
                 <a:cs typeface="Times New Roman" pitchFamily="34" charset="-120"/>
               </a:rPr>
-              <a:t>Vocabulary introduced today</a:t>
+              <a:t>Materials</a:t>
             </a:r>
             <a:endParaRPr lang="en-US" sz="1800" dirty="0"/>
           </a:p>
@@ -2992,7 +3937,7 @@
         <p:spPr>
           <a:xfrm>
             <a:off x="634901" y="883593"/>
-            <a:ext cx="8102798" cy="281880"/>
+            <a:ext cx="8102798" cy="769441"/>
           </a:xfrm>
           <a:prstGeom prst="rect">
             <a:avLst/>
@@ -3015,24 +3960,28 @@
               <a:buChar char="•"/>
             </a:pPr>
             <a:r>
-              <a:rPr lang="en-US" sz="1200" i="1" dirty="0">
-                <a:solidFill>
-                  <a:srgbClr val="1A1A1A"/>
-                </a:solidFill>
-                <a:latin typeface="Georgia" pitchFamily="34" charset="0"/>
-                <a:ea typeface="Georgia" pitchFamily="34" charset="-122"/>
-                <a:cs typeface="Georgia" pitchFamily="34" charset="-120"/>
-              </a:rPr>
-              <a:t>tulasī</a:t>
-            </a:r>
-            <a:pPr algn="l" indent="0" marL="0">
+              <a:rPr lang="en-US" sz="1200" dirty="0">
+                <a:solidFill>
+                  <a:srgbClr val="1A1A1A"/>
+                </a:solidFill>
+                <a:latin typeface="Georgia" pitchFamily="34" charset="0"/>
+                <a:ea typeface="Georgia" pitchFamily="34" charset="-122"/>
+                <a:cs typeface="Georgia" pitchFamily="34" charset="-120"/>
+              </a:rPr>
+              <a:t>Whiteboard / chart paper</a:t>
+            </a:r>
+            <a:endParaRPr lang="en-US" sz="1200" dirty="0"/>
+          </a:p>
+          <a:p>
+            <a:pPr algn="l" marL="342900" indent="-342900">
               <a:lnSpc>
                 <a:spcPts val="1620"/>
               </a:lnSpc>
               <a:spcAft>
                 <a:spcPts val="300"/>
               </a:spcAft>
-              <a:buNone/>
+              <a:buSzPct val="100000"/>
+              <a:buChar char="•"/>
             </a:pPr>
             <a:r>
               <a:rPr lang="en-US" sz="1200" dirty="0">
@@ -3043,36 +3992,20 @@
                 <a:ea typeface="Georgia" pitchFamily="34" charset="-122"/>
                 <a:cs typeface="Georgia" pitchFamily="34" charset="-120"/>
               </a:rPr>
-              <a:t> (IAST: tulasī; lit. "holy basil — </a:t>
-            </a:r>
-            <a:pPr algn="l" indent="0" marL="0">
+              <a:t>Notebook, pen per student</a:t>
+            </a:r>
+            <a:endParaRPr lang="en-US" sz="1200" dirty="0"/>
+          </a:p>
+          <a:p>
+            <a:pPr algn="l" marL="342900" indent="-342900">
               <a:lnSpc>
                 <a:spcPts val="1620"/>
               </a:lnSpc>
               <a:spcAft>
                 <a:spcPts val="300"/>
               </a:spcAft>
-              <a:buNone/>
-            </a:pPr>
-            <a:r>
-              <a:rPr lang="en-US" sz="1200" i="1" dirty="0">
-                <a:solidFill>
-                  <a:srgbClr val="1A1A1A"/>
-                </a:solidFill>
-                <a:latin typeface="Georgia" pitchFamily="34" charset="0"/>
-                <a:ea typeface="Georgia" pitchFamily="34" charset="-122"/>
-                <a:cs typeface="Georgia" pitchFamily="34" charset="-120"/>
-              </a:rPr>
-              <a:t>Ocimum tenuiflorum</a:t>
-            </a:r>
-            <a:pPr algn="l" indent="0" marL="0">
-              <a:lnSpc>
-                <a:spcPts val="1620"/>
-              </a:lnSpc>
-              <a:spcAft>
-                <a:spcPts val="300"/>
-              </a:spcAft>
-              <a:buNone/>
+              <a:buSzPct val="100000"/>
+              <a:buChar char="•"/>
             </a:pPr>
             <a:r>
               <a:rPr lang="en-US" sz="1200" dirty="0">
@@ -3083,7 +4016,7 @@
                 <a:ea typeface="Georgia" pitchFamily="34" charset="-122"/>
                 <a:cs typeface="Georgia" pitchFamily="34" charset="-120"/>
               </a:rPr>
-              <a:t>")</a:t>
+              <a:t>(See lesson-plan.md for any day-specific materials)</a:t>
             </a:r>
             <a:endParaRPr lang="en-US" sz="1200" dirty="0"/>
           </a:p>
@@ -3241,7 +4174,7 @@
                 <a:ea typeface="Times New Roman" pitchFamily="34" charset="-122"/>
                 <a:cs typeface="Times New Roman" pitchFamily="34" charset="-120"/>
               </a:rPr>
-              <a:t>Lesson flow</a:t>
+              <a:t>Vocabulary introduced today</a:t>
             </a:r>
             <a:endParaRPr lang="en-US" sz="1800" dirty="0"/>
           </a:p>
@@ -3250,6 +4183,112 @@
       <p:sp>
         <p:nvSpPr>
           <p:cNvPr id="4" name="Text 2"/>
+          <p:cNvSpPr/>
+          <p:nvPr/>
+        </p:nvSpPr>
+        <p:spPr>
+          <a:xfrm>
+            <a:off x="634901" y="883593"/>
+            <a:ext cx="8102798" cy="281880"/>
+          </a:xfrm>
+          <a:prstGeom prst="rect">
+            <a:avLst/>
+          </a:prstGeom>
+          <a:noFill/>
+          <a:ln/>
+        </p:spPr>
+        <p:txBody>
+          <a:bodyPr wrap="square" lIns="0" tIns="0" rIns="0" bIns="0" rtlCol="0" anchor="t"/>
+          <a:lstStyle/>
+          <a:p>
+            <a:pPr algn="l" marL="342900" indent="-342900">
+              <a:lnSpc>
+                <a:spcPts val="1620"/>
+              </a:lnSpc>
+              <a:spcAft>
+                <a:spcPts val="300"/>
+              </a:spcAft>
+              <a:buSzPct val="100000"/>
+              <a:buChar char="•"/>
+            </a:pPr>
+            <a:r>
+              <a:rPr lang="en-US" sz="1200" i="1" dirty="0">
+                <a:solidFill>
+                  <a:srgbClr val="1A1A1A"/>
+                </a:solidFill>
+                <a:latin typeface="Georgia" pitchFamily="34" charset="0"/>
+                <a:ea typeface="Georgia" pitchFamily="34" charset="-122"/>
+                <a:cs typeface="Georgia" pitchFamily="34" charset="-120"/>
+              </a:rPr>
+              <a:t>tulasī</a:t>
+            </a:r>
+            <a:pPr algn="l" indent="0" marL="0">
+              <a:lnSpc>
+                <a:spcPts val="1620"/>
+              </a:lnSpc>
+              <a:spcAft>
+                <a:spcPts val="300"/>
+              </a:spcAft>
+              <a:buNone/>
+            </a:pPr>
+            <a:r>
+              <a:rPr lang="en-US" sz="1200" dirty="0">
+                <a:solidFill>
+                  <a:srgbClr val="1A1A1A"/>
+                </a:solidFill>
+                <a:latin typeface="Georgia" pitchFamily="34" charset="0"/>
+                <a:ea typeface="Georgia" pitchFamily="34" charset="-122"/>
+                <a:cs typeface="Georgia" pitchFamily="34" charset="-120"/>
+              </a:rPr>
+              <a:t> (IAST: tulasī; lit. "holy basil — </a:t>
+            </a:r>
+            <a:pPr algn="l" indent="0" marL="0">
+              <a:lnSpc>
+                <a:spcPts val="1620"/>
+              </a:lnSpc>
+              <a:spcAft>
+                <a:spcPts val="300"/>
+              </a:spcAft>
+              <a:buNone/>
+            </a:pPr>
+            <a:r>
+              <a:rPr lang="en-US" sz="1200" i="1" dirty="0">
+                <a:solidFill>
+                  <a:srgbClr val="1A1A1A"/>
+                </a:solidFill>
+                <a:latin typeface="Georgia" pitchFamily="34" charset="0"/>
+                <a:ea typeface="Georgia" pitchFamily="34" charset="-122"/>
+                <a:cs typeface="Georgia" pitchFamily="34" charset="-120"/>
+              </a:rPr>
+              <a:t>Ocimum tenuiflorum</a:t>
+            </a:r>
+            <a:pPr algn="l" indent="0" marL="0">
+              <a:lnSpc>
+                <a:spcPts val="1620"/>
+              </a:lnSpc>
+              <a:spcAft>
+                <a:spcPts val="300"/>
+              </a:spcAft>
+              <a:buNone/>
+            </a:pPr>
+            <a:r>
+              <a:rPr lang="en-US" sz="1200" dirty="0">
+                <a:solidFill>
+                  <a:srgbClr val="1A1A1A"/>
+                </a:solidFill>
+                <a:latin typeface="Georgia" pitchFamily="34" charset="0"/>
+                <a:ea typeface="Georgia" pitchFamily="34" charset="-122"/>
+                <a:cs typeface="Georgia" pitchFamily="34" charset="-120"/>
+              </a:rPr>
+              <a:t>")</a:t>
+            </a:r>
+            <a:endParaRPr lang="en-US" sz="1200" dirty="0"/>
+          </a:p>
+        </p:txBody>
+      </p:sp>
+      <p:sp>
+        <p:nvSpPr>
+          <p:cNvPr id="5" name="Text 3"/>
           <p:cNvSpPr/>
           <p:nvPr/>
         </p:nvSpPr>
@@ -3399,7 +4438,7 @@
                 <a:ea typeface="Times New Roman" pitchFamily="34" charset="-122"/>
                 <a:cs typeface="Times New Roman" pitchFamily="34" charset="-120"/>
               </a:rPr>
-              <a:t>Warm-up (5 min)</a:t>
+              <a:t>Lesson flow</a:t>
             </a:r>
             <a:endParaRPr lang="en-US" sz="1800" dirty="0"/>
           </a:p>
@@ -3408,100 +4447,6 @@
       <p:sp>
         <p:nvSpPr>
           <p:cNvPr id="4" name="Text 2"/>
-          <p:cNvSpPr/>
-          <p:nvPr/>
-        </p:nvSpPr>
-        <p:spPr>
-          <a:xfrm>
-            <a:off x="406301" y="870942"/>
-            <a:ext cx="8498026" cy="426541"/>
-          </a:xfrm>
-          <a:prstGeom prst="rect">
-            <a:avLst/>
-          </a:prstGeom>
-          <a:noFill/>
-          <a:ln/>
-        </p:spPr>
-        <p:txBody>
-          <a:bodyPr wrap="square" lIns="0" tIns="0" rIns="0" bIns="0" rtlCol="0" anchor="t"/>
-          <a:lstStyle/>
-          <a:p>
-            <a:pPr algn="l" indent="0" marL="0">
-              <a:lnSpc>
-                <a:spcPts val="1680"/>
-              </a:lnSpc>
-              <a:spcBef>
-                <a:spcPts val="300"/>
-              </a:spcBef>
-              <a:spcAft>
-                <a:spcPts val="300"/>
-              </a:spcAft>
-              <a:buNone/>
-            </a:pPr>
-            <a:r>
-              <a:rPr lang="en-US" sz="1200" dirty="0">
-                <a:solidFill>
-                  <a:srgbClr val="1A1A1A"/>
-                </a:solidFill>
-                <a:latin typeface="Georgia" pitchFamily="34" charset="0"/>
-                <a:ea typeface="Georgia" pitchFamily="34" charset="-122"/>
-                <a:cs typeface="Georgia" pitchFamily="34" charset="-120"/>
-              </a:rPr>
-              <a:t>– Daily check-in: one-sentence response to </a:t>
-            </a:r>
-            <a:pPr algn="l" indent="0" marL="0">
-              <a:lnSpc>
-                <a:spcPts val="1680"/>
-              </a:lnSpc>
-              <a:spcBef>
-                <a:spcPts val="300"/>
-              </a:spcBef>
-              <a:spcAft>
-                <a:spcPts val="300"/>
-              </a:spcAft>
-              <a:buNone/>
-            </a:pPr>
-            <a:r>
-              <a:rPr lang="en-US" sz="1200" i="1" dirty="0">
-                <a:solidFill>
-                  <a:srgbClr val="1A1A1A"/>
-                </a:solidFill>
-                <a:latin typeface="Georgia" pitchFamily="34" charset="0"/>
-                <a:ea typeface="Georgia" pitchFamily="34" charset="-122"/>
-                <a:cs typeface="Georgia" pitchFamily="34" charset="-120"/>
-              </a:rPr>
-              <a:t>"What's one thing you remember about yesterday's lesson?"</a:t>
-            </a:r>
-            <a:pPr algn="l" indent="0" marL="0">
-              <a:lnSpc>
-                <a:spcPts val="1680"/>
-              </a:lnSpc>
-              <a:spcBef>
-                <a:spcPts val="300"/>
-              </a:spcBef>
-              <a:spcAft>
-                <a:spcPts val="300"/>
-              </a:spcAft>
-              <a:buNone/>
-            </a:pPr>
-            <a:r>
-              <a:rPr lang="en-US" sz="1200" dirty="0">
-                <a:solidFill>
-                  <a:srgbClr val="1A1A1A"/>
-                </a:solidFill>
-                <a:latin typeface="Georgia" pitchFamily="34" charset="0"/>
-                <a:ea typeface="Georgia" pitchFamily="34" charset="-122"/>
-                <a:cs typeface="Georgia" pitchFamily="34" charset="-120"/>
-              </a:rPr>
-              <a:t> – Hook: introduce a phenomenon or question that motivates today's concept.</a:t>
-            </a:r>
-            <a:endParaRPr lang="en-US" sz="1200" dirty="0"/>
-          </a:p>
-        </p:txBody>
-      </p:sp>
-      <p:sp>
-        <p:nvSpPr>
-          <p:cNvPr id="5" name="Text 3"/>
           <p:cNvSpPr/>
           <p:nvPr/>
         </p:nvSpPr>
@@ -3651,7 +4596,7 @@
                 <a:ea typeface="Times New Roman" pitchFamily="34" charset="-122"/>
                 <a:cs typeface="Times New Roman" pitchFamily="34" charset="-120"/>
               </a:rPr>
-              <a:t>Core (20 min)</a:t>
+              <a:t>Warm-up (5 min)</a:t>
             </a:r>
             <a:endParaRPr lang="en-US" sz="1800" dirty="0"/>
           </a:p>
@@ -3666,7 +4611,7 @@
         <p:spPr>
           <a:xfrm>
             <a:off x="634901" y="883593"/>
-            <a:ext cx="8102798" cy="487561"/>
+            <a:ext cx="8102798" cy="525661"/>
           </a:xfrm>
           <a:prstGeom prst="rect">
             <a:avLst/>
@@ -3689,15 +4634,15 @@
               <a:buChar char="•"/>
             </a:pPr>
             <a:r>
-              <a:rPr lang="en-US" sz="1200" b="1" dirty="0">
-                <a:solidFill>
-                  <a:srgbClr val="1A1A1A"/>
-                </a:solidFill>
-                <a:latin typeface="Georgia" pitchFamily="34" charset="0"/>
-                <a:ea typeface="Georgia" pitchFamily="34" charset="-122"/>
-                <a:cs typeface="Georgia" pitchFamily="34" charset="-120"/>
-              </a:rPr>
-              <a:t>Botanical identification.</a:t>
+              <a:rPr lang="en-US" sz="1200" dirty="0">
+                <a:solidFill>
+                  <a:srgbClr val="1A1A1A"/>
+                </a:solidFill>
+                <a:latin typeface="Georgia" pitchFamily="34" charset="0"/>
+                <a:ea typeface="Georgia" pitchFamily="34" charset="-122"/>
+                <a:cs typeface="Georgia" pitchFamily="34" charset="-120"/>
+              </a:rPr>
+              <a:t>Daily check-in: one-sentence response to </a:t>
             </a:r>
             <a:pPr algn="l" indent="0" marL="0">
               <a:lnSpc>
@@ -3709,26 +4654,6 @@
               <a:buNone/>
             </a:pPr>
             <a:r>
-              <a:rPr lang="en-US" sz="1200" dirty="0">
-                <a:solidFill>
-                  <a:srgbClr val="1A1A1A"/>
-                </a:solidFill>
-                <a:latin typeface="Georgia" pitchFamily="34" charset="0"/>
-                <a:ea typeface="Georgia" pitchFamily="34" charset="-122"/>
-                <a:cs typeface="Georgia" pitchFamily="34" charset="-120"/>
-              </a:rPr>
-              <a:t> </a:t>
-            </a:r>
-            <a:pPr algn="l" indent="0" marL="0">
-              <a:lnSpc>
-                <a:spcPts val="1620"/>
-              </a:lnSpc>
-              <a:spcAft>
-                <a:spcPts val="300"/>
-              </a:spcAft>
-              <a:buNone/>
-            </a:pPr>
-            <a:r>
               <a:rPr lang="en-US" sz="1200" i="1" dirty="0">
                 <a:solidFill>
                   <a:srgbClr val="1A1A1A"/>
@@ -3737,212 +4662,10 @@
                 <a:ea typeface="Georgia" pitchFamily="34" charset="-122"/>
                 <a:cs typeface="Georgia" pitchFamily="34" charset="-120"/>
               </a:rPr>
-              <a:t>Ocimum tenuiflorum</a:t>
-            </a:r>
-            <a:pPr algn="l" indent="0" marL="0">
-              <a:lnSpc>
-                <a:spcPts val="1620"/>
-              </a:lnSpc>
-              <a:spcAft>
-                <a:spcPts val="300"/>
-              </a:spcAft>
-              <a:buNone/>
-            </a:pPr>
-            <a:r>
-              <a:rPr lang="en-US" sz="1200" dirty="0">
-                <a:solidFill>
-                  <a:srgbClr val="1A1A1A"/>
-                </a:solidFill>
-                <a:latin typeface="Georgia" pitchFamily="34" charset="0"/>
-                <a:ea typeface="Georgia" pitchFamily="34" charset="-122"/>
-                <a:cs typeface="Georgia" pitchFamily="34" charset="-120"/>
-              </a:rPr>
-              <a:t> (also </a:t>
-            </a:r>
-            <a:pPr algn="l" indent="0" marL="0">
-              <a:lnSpc>
-                <a:spcPts val="1620"/>
-              </a:lnSpc>
-              <a:spcAft>
-                <a:spcPts val="300"/>
-              </a:spcAft>
-              <a:buNone/>
-            </a:pPr>
-            <a:r>
-              <a:rPr lang="en-US" sz="1200" i="1" dirty="0">
-                <a:solidFill>
-                  <a:srgbClr val="1A1A1A"/>
-                </a:solidFill>
-                <a:latin typeface="Georgia" pitchFamily="34" charset="0"/>
-                <a:ea typeface="Georgia" pitchFamily="34" charset="-122"/>
-                <a:cs typeface="Georgia" pitchFamily="34" charset="-120"/>
-              </a:rPr>
-              <a:t>O. sanctum</a:t>
-            </a:r>
-            <a:pPr algn="l" indent="0" marL="0">
-              <a:lnSpc>
-                <a:spcPts val="1620"/>
-              </a:lnSpc>
-              <a:spcAft>
-                <a:spcPts val="300"/>
-              </a:spcAft>
-              <a:buNone/>
-            </a:pPr>
-            <a:r>
-              <a:rPr lang="en-US" sz="1200" dirty="0">
-                <a:solidFill>
-                  <a:srgbClr val="1A1A1A"/>
-                </a:solidFill>
-                <a:latin typeface="Georgia" pitchFamily="34" charset="0"/>
-                <a:ea typeface="Georgia" pitchFamily="34" charset="-122"/>
-                <a:cs typeface="Georgia" pitchFamily="34" charset="-120"/>
-              </a:rPr>
-              <a:t>). Square stem, opposite leaves with serrated edges, distinctive aromatic oil glands. Multiple cultivars: </a:t>
-            </a:r>
-            <a:pPr algn="l" indent="0" marL="0">
-              <a:lnSpc>
-                <a:spcPts val="1620"/>
-              </a:lnSpc>
-              <a:spcAft>
-                <a:spcPts val="300"/>
-              </a:spcAft>
-              <a:buNone/>
-            </a:pPr>
-            <a:r>
-              <a:rPr lang="en-US" sz="1200" i="1" dirty="0">
-                <a:solidFill>
-                  <a:srgbClr val="1A1A1A"/>
-                </a:solidFill>
-                <a:latin typeface="Georgia" pitchFamily="34" charset="0"/>
-                <a:ea typeface="Georgia" pitchFamily="34" charset="-122"/>
-                <a:cs typeface="Georgia" pitchFamily="34" charset="-120"/>
-              </a:rPr>
-              <a:t>Rama tulasī</a:t>
-            </a:r>
-            <a:pPr algn="l" indent="0" marL="0">
-              <a:lnSpc>
-                <a:spcPts val="1620"/>
-              </a:lnSpc>
-              <a:spcAft>
-                <a:spcPts val="300"/>
-              </a:spcAft>
-              <a:buNone/>
-            </a:pPr>
-            <a:r>
-              <a:rPr lang="en-US" sz="1200" dirty="0">
-                <a:solidFill>
-                  <a:srgbClr val="1A1A1A"/>
-                </a:solidFill>
-                <a:latin typeface="Georgia" pitchFamily="34" charset="0"/>
-                <a:ea typeface="Georgia" pitchFamily="34" charset="-122"/>
-                <a:cs typeface="Georgia" pitchFamily="34" charset="-120"/>
-              </a:rPr>
-              <a:t> (green), </a:t>
-            </a:r>
-            <a:pPr algn="l" indent="0" marL="0">
-              <a:lnSpc>
-                <a:spcPts val="1620"/>
-              </a:lnSpc>
-              <a:spcAft>
-                <a:spcPts val="300"/>
-              </a:spcAft>
-              <a:buNone/>
-            </a:pPr>
-            <a:r>
-              <a:rPr lang="en-US" sz="1200" i="1" dirty="0">
-                <a:solidFill>
-                  <a:srgbClr val="1A1A1A"/>
-                </a:solidFill>
-                <a:latin typeface="Georgia" pitchFamily="34" charset="0"/>
-                <a:ea typeface="Georgia" pitchFamily="34" charset="-122"/>
-                <a:cs typeface="Georgia" pitchFamily="34" charset="-120"/>
-              </a:rPr>
-              <a:t>Kṛṣṇa tulasī</a:t>
-            </a:r>
-            <a:pPr algn="l" indent="0" marL="0">
-              <a:lnSpc>
-                <a:spcPts val="1620"/>
-              </a:lnSpc>
-              <a:spcAft>
-                <a:spcPts val="300"/>
-              </a:spcAft>
-              <a:buNone/>
-            </a:pPr>
-            <a:r>
-              <a:rPr lang="en-US" sz="1200" dirty="0">
-                <a:solidFill>
-                  <a:srgbClr val="1A1A1A"/>
-                </a:solidFill>
-                <a:latin typeface="Georgia" pitchFamily="34" charset="0"/>
-                <a:ea typeface="Georgia" pitchFamily="34" charset="-122"/>
-                <a:cs typeface="Georgia" pitchFamily="34" charset="-120"/>
-              </a:rPr>
-              <a:t> (purple), </a:t>
-            </a:r>
-            <a:pPr algn="l" indent="0" marL="0">
-              <a:lnSpc>
-                <a:spcPts val="1620"/>
-              </a:lnSpc>
-              <a:spcAft>
-                <a:spcPts val="300"/>
-              </a:spcAft>
-              <a:buNone/>
-            </a:pPr>
-            <a:r>
-              <a:rPr lang="en-US" sz="1200" i="1" dirty="0">
-                <a:solidFill>
-                  <a:srgbClr val="1A1A1A"/>
-                </a:solidFill>
-                <a:latin typeface="Georgia" pitchFamily="34" charset="0"/>
-                <a:ea typeface="Georgia" pitchFamily="34" charset="-122"/>
-                <a:cs typeface="Georgia" pitchFamily="34" charset="-120"/>
-              </a:rPr>
-              <a:t>Vana tulasī</a:t>
-            </a:r>
-            <a:pPr algn="l" indent="0" marL="0">
-              <a:lnSpc>
-                <a:spcPts val="1620"/>
-              </a:lnSpc>
-              <a:spcAft>
-                <a:spcPts val="300"/>
-              </a:spcAft>
-              <a:buNone/>
-            </a:pPr>
-            <a:r>
-              <a:rPr lang="en-US" sz="1200" dirty="0">
-                <a:solidFill>
-                  <a:srgbClr val="1A1A1A"/>
-                </a:solidFill>
-                <a:latin typeface="Georgia" pitchFamily="34" charset="0"/>
-                <a:ea typeface="Georgia" pitchFamily="34" charset="-122"/>
-                <a:cs typeface="Georgia" pitchFamily="34" charset="-120"/>
-              </a:rPr>
-              <a:t> (wild).</a:t>
+              <a:t>"What's one thing you remember about yesterday's lesson?"</a:t>
             </a:r>
             <a:endParaRPr lang="en-US" sz="1200" dirty="0"/>
           </a:p>
-        </p:txBody>
-      </p:sp>
-      <p:sp>
-        <p:nvSpPr>
-          <p:cNvPr id="5" name="Text 3"/>
-          <p:cNvSpPr/>
-          <p:nvPr/>
-        </p:nvSpPr>
-        <p:spPr>
-          <a:xfrm>
-            <a:off x="634901" y="1472654"/>
-            <a:ext cx="8102798" cy="487561"/>
-          </a:xfrm>
-          <a:prstGeom prst="rect">
-            <a:avLst/>
-          </a:prstGeom>
-          <a:noFill/>
-          <a:ln/>
-        </p:spPr>
-        <p:txBody>
-          <a:bodyPr wrap="square" lIns="0" tIns="0" rIns="0" bIns="0" rtlCol="0" anchor="t"/>
-          <a:lstStyle/>
           <a:p>
             <a:pPr algn="l" marL="342900" indent="-342900">
               <a:lnSpc>
@@ -3955,26 +4678,6 @@
               <a:buChar char="•"/>
             </a:pPr>
             <a:r>
-              <a:rPr lang="en-US" sz="1200" b="1" dirty="0">
-                <a:solidFill>
-                  <a:srgbClr val="1A1A1A"/>
-                </a:solidFill>
-                <a:latin typeface="Georgia" pitchFamily="34" charset="0"/>
-                <a:ea typeface="Georgia" pitchFamily="34" charset="-122"/>
-                <a:cs typeface="Georgia" pitchFamily="34" charset="-120"/>
-              </a:rPr>
-              <a:t>Active compound.</a:t>
-            </a:r>
-            <a:pPr algn="l" indent="0" marL="0">
-              <a:lnSpc>
-                <a:spcPts val="1620"/>
-              </a:lnSpc>
-              <a:spcAft>
-                <a:spcPts val="300"/>
-              </a:spcAft>
-              <a:buNone/>
-            </a:pPr>
-            <a:r>
               <a:rPr lang="en-US" sz="1200" dirty="0">
                 <a:solidFill>
                   <a:srgbClr val="1A1A1A"/>
@@ -3983,47 +4686,7 @@
                 <a:ea typeface="Georgia" pitchFamily="34" charset="-122"/>
                 <a:cs typeface="Georgia" pitchFamily="34" charset="-120"/>
               </a:rPr>
-              <a:t> Eugenol (60-70% of essential oil), ursolic acid, rosmarinic acid. Some research on adaptogenic / anti-inflammatory effects (Cohen, 2014 — </a:t>
-            </a:r>
-            <a:pPr algn="l" indent="0" marL="0">
-              <a:lnSpc>
-                <a:spcPts val="1620"/>
-              </a:lnSpc>
-              <a:spcAft>
-                <a:spcPts val="300"/>
-              </a:spcAft>
-              <a:buNone/>
-            </a:pPr>
-            <a:r>
-              <a:rPr lang="en-US" sz="1200" i="1" dirty="0">
-                <a:solidFill>
-                  <a:srgbClr val="1A1A1A"/>
-                </a:solidFill>
-                <a:latin typeface="Georgia" pitchFamily="34" charset="0"/>
-                <a:ea typeface="Georgia" pitchFamily="34" charset="-122"/>
-                <a:cs typeface="Georgia" pitchFamily="34" charset="-120"/>
-              </a:rPr>
-              <a:t>Journal of Ayurveda and Integrative Medicine</a:t>
-            </a:r>
-            <a:pPr algn="l" indent="0" marL="0">
-              <a:lnSpc>
-                <a:spcPts val="1620"/>
-              </a:lnSpc>
-              <a:spcAft>
-                <a:spcPts val="300"/>
-              </a:spcAft>
-              <a:buNone/>
-            </a:pPr>
-            <a:r>
-              <a:rPr lang="en-US" sz="1200" dirty="0">
-                <a:solidFill>
-                  <a:srgbClr val="1A1A1A"/>
-                </a:solidFill>
-                <a:latin typeface="Georgia" pitchFamily="34" charset="0"/>
-                <a:ea typeface="Georgia" pitchFamily="34" charset="-122"/>
-                <a:cs typeface="Georgia" pitchFamily="34" charset="-120"/>
-              </a:rPr>
-              <a:t>).</a:t>
+              <a:t>Hook: introduce a phenomenon or question that motivates today's concept.</a:t>
             </a:r>
             <a:endParaRPr lang="en-US" sz="1200" dirty="0"/>
           </a:p>
@@ -4031,285 +4694,7 @@
       </p:sp>
       <p:sp>
         <p:nvSpPr>
-          <p:cNvPr id="6" name="Text 4"/>
-          <p:cNvSpPr/>
-          <p:nvPr/>
-        </p:nvSpPr>
-        <p:spPr>
-          <a:xfrm>
-            <a:off x="634901" y="2061716"/>
-            <a:ext cx="8102798" cy="487561"/>
-          </a:xfrm>
-          <a:prstGeom prst="rect">
-            <a:avLst/>
-          </a:prstGeom>
-          <a:noFill/>
-          <a:ln/>
-        </p:spPr>
-        <p:txBody>
-          <a:bodyPr wrap="square" lIns="0" tIns="0" rIns="0" bIns="0" rtlCol="0" anchor="t"/>
-          <a:lstStyle/>
-          <a:p>
-            <a:pPr algn="l" marL="342900" indent="-342900">
-              <a:lnSpc>
-                <a:spcPts val="1620"/>
-              </a:lnSpc>
-              <a:spcAft>
-                <a:spcPts val="300"/>
-              </a:spcAft>
-              <a:buSzPct val="100000"/>
-              <a:buChar char="•"/>
-            </a:pPr>
-            <a:r>
-              <a:rPr lang="en-US" sz="1200" b="1" dirty="0">
-                <a:solidFill>
-                  <a:srgbClr val="1A1A1A"/>
-                </a:solidFill>
-                <a:latin typeface="Georgia" pitchFamily="34" charset="0"/>
-                <a:ea typeface="Georgia" pitchFamily="34" charset="-122"/>
-                <a:cs typeface="Georgia" pitchFamily="34" charset="-120"/>
-              </a:rPr>
-              <a:t>Traditional uses.</a:t>
-            </a:r>
-            <a:pPr algn="l" indent="0" marL="0">
-              <a:lnSpc>
-                <a:spcPts val="1620"/>
-              </a:lnSpc>
-              <a:spcAft>
-                <a:spcPts val="300"/>
-              </a:spcAft>
-              <a:buNone/>
-            </a:pPr>
-            <a:r>
-              <a:rPr lang="en-US" sz="1200" dirty="0">
-                <a:solidFill>
-                  <a:srgbClr val="1A1A1A"/>
-                </a:solidFill>
-                <a:latin typeface="Georgia" pitchFamily="34" charset="0"/>
-                <a:ea typeface="Georgia" pitchFamily="34" charset="-122"/>
-                <a:cs typeface="Georgia" pitchFamily="34" charset="-120"/>
-              </a:rPr>
-              <a:t> Caraka and Suśruta cite </a:t>
-            </a:r>
-            <a:pPr algn="l" indent="0" marL="0">
-              <a:lnSpc>
-                <a:spcPts val="1620"/>
-              </a:lnSpc>
-              <a:spcAft>
-                <a:spcPts val="300"/>
-              </a:spcAft>
-              <a:buNone/>
-            </a:pPr>
-            <a:r>
-              <a:rPr lang="en-US" sz="1200" i="1" dirty="0">
-                <a:solidFill>
-                  <a:srgbClr val="1A1A1A"/>
-                </a:solidFill>
-                <a:latin typeface="Georgia" pitchFamily="34" charset="0"/>
-                <a:ea typeface="Georgia" pitchFamily="34" charset="-122"/>
-                <a:cs typeface="Georgia" pitchFamily="34" charset="-120"/>
-              </a:rPr>
-              <a:t>tulasī</a:t>
-            </a:r>
-            <a:pPr algn="l" indent="0" marL="0">
-              <a:lnSpc>
-                <a:spcPts val="1620"/>
-              </a:lnSpc>
-              <a:spcAft>
-                <a:spcPts val="300"/>
-              </a:spcAft>
-              <a:buNone/>
-            </a:pPr>
-            <a:r>
-              <a:rPr lang="en-US" sz="1200" dirty="0">
-                <a:solidFill>
-                  <a:srgbClr val="1A1A1A"/>
-                </a:solidFill>
-                <a:latin typeface="Georgia" pitchFamily="34" charset="0"/>
-                <a:ea typeface="Georgia" pitchFamily="34" charset="-122"/>
-                <a:cs typeface="Georgia" pitchFamily="34" charset="-120"/>
-              </a:rPr>
-              <a:t> for: cough, cold, low-grade fever, indigestion (in tea form), as a bedside plant for air quality.</a:t>
-            </a:r>
-            <a:endParaRPr lang="en-US" sz="1200" dirty="0"/>
-          </a:p>
-        </p:txBody>
-      </p:sp>
-      <p:sp>
-        <p:nvSpPr>
-          <p:cNvPr id="7" name="Text 5"/>
-          <p:cNvSpPr/>
-          <p:nvPr/>
-        </p:nvSpPr>
-        <p:spPr>
-          <a:xfrm>
-            <a:off x="634901" y="2650778"/>
-            <a:ext cx="8102798" cy="487561"/>
-          </a:xfrm>
-          <a:prstGeom prst="rect">
-            <a:avLst/>
-          </a:prstGeom>
-          <a:noFill/>
-          <a:ln/>
-        </p:spPr>
-        <p:txBody>
-          <a:bodyPr wrap="square" lIns="0" tIns="0" rIns="0" bIns="0" rtlCol="0" anchor="t"/>
-          <a:lstStyle/>
-          <a:p>
-            <a:pPr algn="l" marL="342900" indent="-342900">
-              <a:lnSpc>
-                <a:spcPts val="1620"/>
-              </a:lnSpc>
-              <a:spcAft>
-                <a:spcPts val="300"/>
-              </a:spcAft>
-              <a:buSzPct val="100000"/>
-              <a:buChar char="•"/>
-            </a:pPr>
-            <a:r>
-              <a:rPr lang="en-US" sz="1200" b="1" dirty="0">
-                <a:solidFill>
-                  <a:srgbClr val="1A1A1A"/>
-                </a:solidFill>
-                <a:latin typeface="Georgia" pitchFamily="34" charset="0"/>
-                <a:ea typeface="Georgia" pitchFamily="34" charset="-122"/>
-                <a:cs typeface="Georgia" pitchFamily="34" charset="-120"/>
-              </a:rPr>
-              <a:t>Source.</a:t>
-            </a:r>
-            <a:pPr algn="l" indent="0" marL="0">
-              <a:lnSpc>
-                <a:spcPts val="1620"/>
-              </a:lnSpc>
-              <a:spcAft>
-                <a:spcPts val="300"/>
-              </a:spcAft>
-              <a:buNone/>
-            </a:pPr>
-            <a:r>
-              <a:rPr lang="en-US" sz="1200" dirty="0">
-                <a:solidFill>
-                  <a:srgbClr val="1A1A1A"/>
-                </a:solidFill>
-                <a:latin typeface="Georgia" pitchFamily="34" charset="0"/>
-                <a:ea typeface="Georgia" pitchFamily="34" charset="-122"/>
-                <a:cs typeface="Georgia" pitchFamily="34" charset="-120"/>
-              </a:rPr>
-              <a:t> Atharva Veda 10.97 — Auṣadhi Sūkta — though not naming tulasī specifically, the framing of "herbs as healing beings" begins here. Caraka </a:t>
-            </a:r>
-            <a:pPr algn="l" indent="0" marL="0">
-              <a:lnSpc>
-                <a:spcPts val="1620"/>
-              </a:lnSpc>
-              <a:spcAft>
-                <a:spcPts val="300"/>
-              </a:spcAft>
-              <a:buNone/>
-            </a:pPr>
-            <a:r>
-              <a:rPr lang="en-US" sz="1200" i="1" dirty="0">
-                <a:solidFill>
-                  <a:srgbClr val="1A1A1A"/>
-                </a:solidFill>
-                <a:latin typeface="Georgia" pitchFamily="34" charset="0"/>
-                <a:ea typeface="Georgia" pitchFamily="34" charset="-122"/>
-                <a:cs typeface="Georgia" pitchFamily="34" charset="-120"/>
-              </a:rPr>
-              <a:t>Sūtrasthāna</a:t>
-            </a:r>
-            <a:pPr algn="l" indent="0" marL="0">
-              <a:lnSpc>
-                <a:spcPts val="1620"/>
-              </a:lnSpc>
-              <a:spcAft>
-                <a:spcPts val="300"/>
-              </a:spcAft>
-              <a:buNone/>
-            </a:pPr>
-            <a:r>
-              <a:rPr lang="en-US" sz="1200" dirty="0">
-                <a:solidFill>
-                  <a:srgbClr val="1A1A1A"/>
-                </a:solidFill>
-                <a:latin typeface="Georgia" pitchFamily="34" charset="0"/>
-                <a:ea typeface="Georgia" pitchFamily="34" charset="-122"/>
-                <a:cs typeface="Georgia" pitchFamily="34" charset="-120"/>
-              </a:rPr>
-              <a:t> 26 lists tulasī formally.</a:t>
-            </a:r>
-            <a:endParaRPr lang="en-US" sz="1200" dirty="0"/>
-          </a:p>
-        </p:txBody>
-      </p:sp>
-      <p:sp>
-        <p:nvSpPr>
-          <p:cNvPr id="8" name="Text 6"/>
-          <p:cNvSpPr/>
-          <p:nvPr/>
-        </p:nvSpPr>
-        <p:spPr>
-          <a:xfrm>
-            <a:off x="634901" y="3239839"/>
-            <a:ext cx="8102798" cy="487561"/>
-          </a:xfrm>
-          <a:prstGeom prst="rect">
-            <a:avLst/>
-          </a:prstGeom>
-          <a:noFill/>
-          <a:ln/>
-        </p:spPr>
-        <p:txBody>
-          <a:bodyPr wrap="square" lIns="0" tIns="0" rIns="0" bIns="0" rtlCol="0" anchor="t"/>
-          <a:lstStyle/>
-          <a:p>
-            <a:pPr algn="l" marL="342900" indent="-342900">
-              <a:lnSpc>
-                <a:spcPts val="1620"/>
-              </a:lnSpc>
-              <a:spcAft>
-                <a:spcPts val="300"/>
-              </a:spcAft>
-              <a:buSzPct val="100000"/>
-              <a:buChar char="•"/>
-            </a:pPr>
-            <a:r>
-              <a:rPr lang="en-US" sz="1200" b="1" dirty="0">
-                <a:solidFill>
-                  <a:srgbClr val="1A1A1A"/>
-                </a:solidFill>
-                <a:latin typeface="Georgia" pitchFamily="34" charset="0"/>
-                <a:ea typeface="Georgia" pitchFamily="34" charset="-122"/>
-                <a:cs typeface="Georgia" pitchFamily="34" charset="-120"/>
-              </a:rPr>
-              <a:t>Smell-test demo.</a:t>
-            </a:r>
-            <a:pPr algn="l" indent="0" marL="0">
-              <a:lnSpc>
-                <a:spcPts val="1620"/>
-              </a:lnSpc>
-              <a:spcAft>
-                <a:spcPts val="300"/>
-              </a:spcAft>
-              <a:buNone/>
-            </a:pPr>
-            <a:r>
-              <a:rPr lang="en-US" sz="1200" dirty="0">
-                <a:solidFill>
-                  <a:srgbClr val="1A1A1A"/>
-                </a:solidFill>
-                <a:latin typeface="Georgia" pitchFamily="34" charset="0"/>
-                <a:ea typeface="Georgia" pitchFamily="34" charset="-122"/>
-                <a:cs typeface="Georgia" pitchFamily="34" charset="-120"/>
-              </a:rPr>
-              <a:t> Crush a leaf; pass around. Note clove-like aroma (eugenol). Modern aroma-chemistry: same compound (eugenol) gives cloves their scent.</a:t>
-            </a:r>
-            <a:endParaRPr lang="en-US" sz="1200" dirty="0"/>
-          </a:p>
-        </p:txBody>
-      </p:sp>
-      <p:sp>
-        <p:nvSpPr>
-          <p:cNvPr id="9" name="Text 7"/>
+          <p:cNvPr id="5" name="Text 3"/>
           <p:cNvSpPr/>
           <p:nvPr/>
         </p:nvSpPr>
@@ -4459,7 +4844,7 @@
                 <a:ea typeface="Times New Roman" pitchFamily="34" charset="-122"/>
                 <a:cs typeface="Times New Roman" pitchFamily="34" charset="-120"/>
               </a:rPr>
-              <a:t>Activity (15 min)</a:t>
+              <a:t>Core (20 min)</a:t>
             </a:r>
             <a:endParaRPr lang="en-US" sz="1800" dirty="0"/>
           </a:p>
@@ -4473,8 +4858,8 @@
         </p:nvSpPr>
         <p:spPr>
           <a:xfrm>
-            <a:off x="406301" y="870942"/>
-            <a:ext cx="8498026" cy="436066"/>
+            <a:off x="634901" y="883593"/>
+            <a:ext cx="8102798" cy="487561"/>
           </a:xfrm>
           <a:prstGeom prst="rect">
             <a:avLst/>
@@ -4486,13 +4871,31 @@
           <a:bodyPr wrap="square" lIns="0" tIns="0" rIns="0" bIns="0" rtlCol="0" anchor="t"/>
           <a:lstStyle/>
           <a:p>
-            <a:pPr algn="l" indent="0" marL="0">
-              <a:lnSpc>
-                <a:spcPts val="1680"/>
-              </a:lnSpc>
-              <a:spcBef>
-                <a:spcPts val="300"/>
-              </a:spcBef>
+            <a:pPr algn="l" marL="342900" indent="-342900">
+              <a:lnSpc>
+                <a:spcPts val="1620"/>
+              </a:lnSpc>
+              <a:spcAft>
+                <a:spcPts val="300"/>
+              </a:spcAft>
+              <a:buSzPct val="100000"/>
+              <a:buChar char="•"/>
+            </a:pPr>
+            <a:r>
+              <a:rPr lang="en-US" sz="1200" b="1" dirty="0">
+                <a:solidFill>
+                  <a:srgbClr val="1A1A1A"/>
+                </a:solidFill>
+                <a:latin typeface="Georgia" pitchFamily="34" charset="0"/>
+                <a:ea typeface="Georgia" pitchFamily="34" charset="-122"/>
+                <a:cs typeface="Georgia" pitchFamily="34" charset="-120"/>
+              </a:rPr>
+              <a:t>Botanical identification.</a:t>
+            </a:r>
+            <a:pPr algn="l" indent="0" marL="0">
+              <a:lnSpc>
+                <a:spcPts val="1620"/>
+              </a:lnSpc>
               <a:spcAft>
                 <a:spcPts val="300"/>
               </a:spcAft>
@@ -4507,15 +4910,12 @@
                 <a:ea typeface="Georgia" pitchFamily="34" charset="-122"/>
                 <a:cs typeface="Georgia" pitchFamily="34" charset="-120"/>
               </a:rPr>
-              <a:t>A scaled version of </a:t>
-            </a:r>
-            <a:pPr algn="l" indent="0" marL="0">
-              <a:lnSpc>
-                <a:spcPts val="1680"/>
-              </a:lnSpc>
-              <a:spcBef>
-                <a:spcPts val="300"/>
-              </a:spcBef>
+              <a:t> </a:t>
+            </a:r>
+            <a:pPr algn="l" indent="0" marL="0">
+              <a:lnSpc>
+                <a:spcPts val="1620"/>
+              </a:lnSpc>
               <a:spcAft>
                 <a:spcPts val="300"/>
               </a:spcAft>
@@ -4530,15 +4930,12 @@
                 <a:ea typeface="Georgia" pitchFamily="34" charset="-122"/>
                 <a:cs typeface="Georgia" pitchFamily="34" charset="-120"/>
               </a:rPr>
-              <a:t>Blind Smell-Test Identification</a:t>
-            </a:r>
-            <a:pPr algn="l" indent="0" marL="0">
-              <a:lnSpc>
-                <a:spcPts val="1680"/>
-              </a:lnSpc>
-              <a:spcBef>
-                <a:spcPts val="300"/>
-              </a:spcBef>
+              <a:t>Ocimum tenuiflorum</a:t>
+            </a:r>
+            <a:pPr algn="l" indent="0" marL="0">
+              <a:lnSpc>
+                <a:spcPts val="1620"/>
+              </a:lnSpc>
               <a:spcAft>
                 <a:spcPts val="300"/>
               </a:spcAft>
@@ -4553,15 +4950,32 @@
                 <a:ea typeface="Georgia" pitchFamily="34" charset="-122"/>
                 <a:cs typeface="Georgia" pitchFamily="34" charset="-120"/>
               </a:rPr>
-              <a:t> (see </a:t>
-            </a:r>
-            <a:pPr algn="l" indent="0" marL="0">
-              <a:lnSpc>
-                <a:spcPts val="1680"/>
-              </a:lnSpc>
-              <a:spcBef>
-                <a:spcPts val="300"/>
-              </a:spcBef>
+              <a:t> (also </a:t>
+            </a:r>
+            <a:pPr algn="l" indent="0" marL="0">
+              <a:lnSpc>
+                <a:spcPts val="1620"/>
+              </a:lnSpc>
+              <a:spcAft>
+                <a:spcPts val="300"/>
+              </a:spcAft>
+              <a:buNone/>
+            </a:pPr>
+            <a:r>
+              <a:rPr lang="en-US" sz="1200" i="1" dirty="0">
+                <a:solidFill>
+                  <a:srgbClr val="1A1A1A"/>
+                </a:solidFill>
+                <a:latin typeface="Georgia" pitchFamily="34" charset="0"/>
+                <a:ea typeface="Georgia" pitchFamily="34" charset="-122"/>
+                <a:cs typeface="Georgia" pitchFamily="34" charset="-120"/>
+              </a:rPr>
+              <a:t>O. sanctum</a:t>
+            </a:r>
+            <a:pPr algn="l" indent="0" marL="0">
+              <a:lnSpc>
+                <a:spcPts val="1620"/>
+              </a:lnSpc>
               <a:spcAft>
                 <a:spcPts val="300"/>
               </a:spcAft>
@@ -4576,15 +4990,32 @@
                 <a:ea typeface="Georgia" pitchFamily="34" charset="-122"/>
                 <a:cs typeface="Georgia" pitchFamily="34" charset="-120"/>
               </a:rPr>
-              <a:t>activities/</a:t>
-            </a:r>
-            <a:pPr algn="l" indent="0" marL="0">
-              <a:lnSpc>
-                <a:spcPts val="1680"/>
-              </a:lnSpc>
-              <a:spcBef>
-                <a:spcPts val="300"/>
-              </a:spcBef>
+              <a:t>). Square stem, opposite leaves with serrated edges, distinctive aromatic oil glands. Multiple cultivars: </a:t>
+            </a:r>
+            <a:pPr algn="l" indent="0" marL="0">
+              <a:lnSpc>
+                <a:spcPts val="1620"/>
+              </a:lnSpc>
+              <a:spcAft>
+                <a:spcPts val="300"/>
+              </a:spcAft>
+              <a:buNone/>
+            </a:pPr>
+            <a:r>
+              <a:rPr lang="en-US" sz="1200" i="1" dirty="0">
+                <a:solidFill>
+                  <a:srgbClr val="1A1A1A"/>
+                </a:solidFill>
+                <a:latin typeface="Georgia" pitchFamily="34" charset="0"/>
+                <a:ea typeface="Georgia" pitchFamily="34" charset="-122"/>
+                <a:cs typeface="Georgia" pitchFamily="34" charset="-120"/>
+              </a:rPr>
+              <a:t>Rama tulasī</a:t>
+            </a:r>
+            <a:pPr algn="l" indent="0" marL="0">
+              <a:lnSpc>
+                <a:spcPts val="1620"/>
+              </a:lnSpc>
               <a:spcAft>
                 <a:spcPts val="300"/>
               </a:spcAft>
@@ -4599,7 +5030,87 @@
                 <a:ea typeface="Georgia" pitchFamily="34" charset="-122"/>
                 <a:cs typeface="Georgia" pitchFamily="34" charset="-120"/>
               </a:rPr>
-              <a:t>). Today's slice: focus on the part of the activity that reinforces Tulsī — Holy Basil.</a:t>
+              <a:t> (green), </a:t>
+            </a:r>
+            <a:pPr algn="l" indent="0" marL="0">
+              <a:lnSpc>
+                <a:spcPts val="1620"/>
+              </a:lnSpc>
+              <a:spcAft>
+                <a:spcPts val="300"/>
+              </a:spcAft>
+              <a:buNone/>
+            </a:pPr>
+            <a:r>
+              <a:rPr lang="en-US" sz="1200" i="1" dirty="0">
+                <a:solidFill>
+                  <a:srgbClr val="1A1A1A"/>
+                </a:solidFill>
+                <a:latin typeface="Georgia" pitchFamily="34" charset="0"/>
+                <a:ea typeface="Georgia" pitchFamily="34" charset="-122"/>
+                <a:cs typeface="Georgia" pitchFamily="34" charset="-120"/>
+              </a:rPr>
+              <a:t>Kṛṣṇa tulasī</a:t>
+            </a:r>
+            <a:pPr algn="l" indent="0" marL="0">
+              <a:lnSpc>
+                <a:spcPts val="1620"/>
+              </a:lnSpc>
+              <a:spcAft>
+                <a:spcPts val="300"/>
+              </a:spcAft>
+              <a:buNone/>
+            </a:pPr>
+            <a:r>
+              <a:rPr lang="en-US" sz="1200" dirty="0">
+                <a:solidFill>
+                  <a:srgbClr val="1A1A1A"/>
+                </a:solidFill>
+                <a:latin typeface="Georgia" pitchFamily="34" charset="0"/>
+                <a:ea typeface="Georgia" pitchFamily="34" charset="-122"/>
+                <a:cs typeface="Georgia" pitchFamily="34" charset="-120"/>
+              </a:rPr>
+              <a:t> (purple), </a:t>
+            </a:r>
+            <a:pPr algn="l" indent="0" marL="0">
+              <a:lnSpc>
+                <a:spcPts val="1620"/>
+              </a:lnSpc>
+              <a:spcAft>
+                <a:spcPts val="300"/>
+              </a:spcAft>
+              <a:buNone/>
+            </a:pPr>
+            <a:r>
+              <a:rPr lang="en-US" sz="1200" i="1" dirty="0">
+                <a:solidFill>
+                  <a:srgbClr val="1A1A1A"/>
+                </a:solidFill>
+                <a:latin typeface="Georgia" pitchFamily="34" charset="0"/>
+                <a:ea typeface="Georgia" pitchFamily="34" charset="-122"/>
+                <a:cs typeface="Georgia" pitchFamily="34" charset="-120"/>
+              </a:rPr>
+              <a:t>Vana tulasī</a:t>
+            </a:r>
+            <a:pPr algn="l" indent="0" marL="0">
+              <a:lnSpc>
+                <a:spcPts val="1620"/>
+              </a:lnSpc>
+              <a:spcAft>
+                <a:spcPts val="300"/>
+              </a:spcAft>
+              <a:buNone/>
+            </a:pPr>
+            <a:r>
+              <a:rPr lang="en-US" sz="1200" dirty="0">
+                <a:solidFill>
+                  <a:srgbClr val="1A1A1A"/>
+                </a:solidFill>
+                <a:latin typeface="Georgia" pitchFamily="34" charset="0"/>
+                <a:ea typeface="Georgia" pitchFamily="34" charset="-122"/>
+                <a:cs typeface="Georgia" pitchFamily="34" charset="-120"/>
+              </a:rPr>
+              <a:t> (wild).</a:t>
             </a:r>
             <a:endParaRPr lang="en-US" sz="1200" dirty="0"/>
           </a:p>
@@ -4608,6 +5119,112 @@
       <p:sp>
         <p:nvSpPr>
           <p:cNvPr id="5" name="Text 3"/>
+          <p:cNvSpPr/>
+          <p:nvPr/>
+        </p:nvSpPr>
+        <p:spPr>
+          <a:xfrm>
+            <a:off x="634901" y="1472654"/>
+            <a:ext cx="8102798" cy="487561"/>
+          </a:xfrm>
+          <a:prstGeom prst="rect">
+            <a:avLst/>
+          </a:prstGeom>
+          <a:noFill/>
+          <a:ln/>
+        </p:spPr>
+        <p:txBody>
+          <a:bodyPr wrap="square" lIns="0" tIns="0" rIns="0" bIns="0" rtlCol="0" anchor="t"/>
+          <a:lstStyle/>
+          <a:p>
+            <a:pPr algn="l" marL="342900" indent="-342900">
+              <a:lnSpc>
+                <a:spcPts val="1620"/>
+              </a:lnSpc>
+              <a:spcAft>
+                <a:spcPts val="300"/>
+              </a:spcAft>
+              <a:buSzPct val="100000"/>
+              <a:buChar char="•"/>
+            </a:pPr>
+            <a:r>
+              <a:rPr lang="en-US" sz="1200" b="1" dirty="0">
+                <a:solidFill>
+                  <a:srgbClr val="1A1A1A"/>
+                </a:solidFill>
+                <a:latin typeface="Georgia" pitchFamily="34" charset="0"/>
+                <a:ea typeface="Georgia" pitchFamily="34" charset="-122"/>
+                <a:cs typeface="Georgia" pitchFamily="34" charset="-120"/>
+              </a:rPr>
+              <a:t>Active compound.</a:t>
+            </a:r>
+            <a:pPr algn="l" indent="0" marL="0">
+              <a:lnSpc>
+                <a:spcPts val="1620"/>
+              </a:lnSpc>
+              <a:spcAft>
+                <a:spcPts val="300"/>
+              </a:spcAft>
+              <a:buNone/>
+            </a:pPr>
+            <a:r>
+              <a:rPr lang="en-US" sz="1200" dirty="0">
+                <a:solidFill>
+                  <a:srgbClr val="1A1A1A"/>
+                </a:solidFill>
+                <a:latin typeface="Georgia" pitchFamily="34" charset="0"/>
+                <a:ea typeface="Georgia" pitchFamily="34" charset="-122"/>
+                <a:cs typeface="Georgia" pitchFamily="34" charset="-120"/>
+              </a:rPr>
+              <a:t> Eugenol (60-70% of essential oil), ursolic acid, rosmarinic acid. Some research on adaptogenic / anti-inflammatory effects (Cohen, 2014 — </a:t>
+            </a:r>
+            <a:pPr algn="l" indent="0" marL="0">
+              <a:lnSpc>
+                <a:spcPts val="1620"/>
+              </a:lnSpc>
+              <a:spcAft>
+                <a:spcPts val="300"/>
+              </a:spcAft>
+              <a:buNone/>
+            </a:pPr>
+            <a:r>
+              <a:rPr lang="en-US" sz="1200" i="1" dirty="0">
+                <a:solidFill>
+                  <a:srgbClr val="1A1A1A"/>
+                </a:solidFill>
+                <a:latin typeface="Georgia" pitchFamily="34" charset="0"/>
+                <a:ea typeface="Georgia" pitchFamily="34" charset="-122"/>
+                <a:cs typeface="Georgia" pitchFamily="34" charset="-120"/>
+              </a:rPr>
+              <a:t>Journal of Ayurveda and Integrative Medicine</a:t>
+            </a:r>
+            <a:pPr algn="l" indent="0" marL="0">
+              <a:lnSpc>
+                <a:spcPts val="1620"/>
+              </a:lnSpc>
+              <a:spcAft>
+                <a:spcPts val="300"/>
+              </a:spcAft>
+              <a:buNone/>
+            </a:pPr>
+            <a:r>
+              <a:rPr lang="en-US" sz="1200" dirty="0">
+                <a:solidFill>
+                  <a:srgbClr val="1A1A1A"/>
+                </a:solidFill>
+                <a:latin typeface="Georgia" pitchFamily="34" charset="0"/>
+                <a:ea typeface="Georgia" pitchFamily="34" charset="-122"/>
+                <a:cs typeface="Georgia" pitchFamily="34" charset="-120"/>
+              </a:rPr>
+              <a:t>).</a:t>
+            </a:r>
+            <a:endParaRPr lang="en-US" sz="1200" dirty="0"/>
+          </a:p>
+        </p:txBody>
+      </p:sp>
+      <p:sp>
+        <p:nvSpPr>
+          <p:cNvPr id="6" name="Text 4"/>
           <p:cNvSpPr/>
           <p:nvPr/>
         </p:nvSpPr>
@@ -4757,7 +5374,7 @@
                 <a:ea typeface="Times New Roman" pitchFamily="34" charset="-122"/>
                 <a:cs typeface="Times New Roman" pitchFamily="34" charset="-120"/>
               </a:rPr>
-              <a:t>Wrap-up (5 min)</a:t>
+              <a:t>Core (20 min) (cont.)</a:t>
             </a:r>
             <a:endParaRPr lang="en-US" sz="1800" dirty="0"/>
           </a:p>
@@ -4771,8 +5388,8 @@
         </p:nvSpPr>
         <p:spPr>
           <a:xfrm>
-            <a:off x="406301" y="870942"/>
-            <a:ext cx="8498026" cy="213271"/>
+            <a:off x="634901" y="883593"/>
+            <a:ext cx="8102798" cy="487561"/>
           </a:xfrm>
           <a:prstGeom prst="rect">
             <a:avLst/>
@@ -4784,13 +5401,31 @@
           <a:bodyPr wrap="square" lIns="0" tIns="0" rIns="0" bIns="0" rtlCol="0" anchor="t"/>
           <a:lstStyle/>
           <a:p>
-            <a:pPr algn="l" indent="0" marL="0">
-              <a:lnSpc>
-                <a:spcPts val="1680"/>
-              </a:lnSpc>
-              <a:spcBef>
-                <a:spcPts val="300"/>
-              </a:spcBef>
+            <a:pPr algn="l" marL="342900" indent="-342900">
+              <a:lnSpc>
+                <a:spcPts val="1620"/>
+              </a:lnSpc>
+              <a:spcAft>
+                <a:spcPts val="300"/>
+              </a:spcAft>
+              <a:buSzPct val="100000"/>
+              <a:buChar char="•"/>
+            </a:pPr>
+            <a:r>
+              <a:rPr lang="en-US" sz="1200" b="1" dirty="0">
+                <a:solidFill>
+                  <a:srgbClr val="1A1A1A"/>
+                </a:solidFill>
+                <a:latin typeface="Georgia" pitchFamily="34" charset="0"/>
+                <a:ea typeface="Georgia" pitchFamily="34" charset="-122"/>
+                <a:cs typeface="Georgia" pitchFamily="34" charset="-120"/>
+              </a:rPr>
+              <a:t>Traditional uses.</a:t>
+            </a:r>
+            <a:pPr algn="l" indent="0" marL="0">
+              <a:lnSpc>
+                <a:spcPts val="1620"/>
+              </a:lnSpc>
               <a:spcAft>
                 <a:spcPts val="300"/>
               </a:spcAft>
@@ -4805,15 +5440,12 @@
                 <a:ea typeface="Georgia" pitchFamily="34" charset="-122"/>
                 <a:cs typeface="Georgia" pitchFamily="34" charset="-120"/>
               </a:rPr>
-              <a:t>– One-sentence exit ticket: </a:t>
-            </a:r>
-            <a:pPr algn="l" indent="0" marL="0">
-              <a:lnSpc>
-                <a:spcPts val="1680"/>
-              </a:lnSpc>
-              <a:spcBef>
-                <a:spcPts val="300"/>
-              </a:spcBef>
+              <a:t> Caraka and Suśruta cite </a:t>
+            </a:r>
+            <a:pPr algn="l" indent="0" marL="0">
+              <a:lnSpc>
+                <a:spcPts val="1620"/>
+              </a:lnSpc>
               <a:spcAft>
                 <a:spcPts val="300"/>
               </a:spcAft>
@@ -4828,15 +5460,12 @@
                 <a:ea typeface="Georgia" pitchFamily="34" charset="-122"/>
                 <a:cs typeface="Georgia" pitchFamily="34" charset="-120"/>
               </a:rPr>
-              <a:t>"What's one thing you learned today?"</a:t>
-            </a:r>
-            <a:pPr algn="l" indent="0" marL="0">
-              <a:lnSpc>
-                <a:spcPts val="1680"/>
-              </a:lnSpc>
-              <a:spcBef>
-                <a:spcPts val="300"/>
-              </a:spcBef>
+              <a:t>tulasī</a:t>
+            </a:r>
+            <a:pPr algn="l" indent="0" marL="0">
+              <a:lnSpc>
+                <a:spcPts val="1620"/>
+              </a:lnSpc>
               <a:spcAft>
                 <a:spcPts val="300"/>
               </a:spcAft>
@@ -4851,7 +5480,7 @@
                 <a:ea typeface="Georgia" pitchFamily="34" charset="-122"/>
                 <a:cs typeface="Georgia" pitchFamily="34" charset="-120"/>
               </a:rPr>
-              <a:t> – Preview tomorrow.</a:t>
+              <a:t> for: cough, cold, low-grade fever, indigestion (in tea form), as a bedside plant for air quality.</a:t>
             </a:r>
             <a:endParaRPr lang="en-US" sz="1200" dirty="0"/>
           </a:p>
@@ -4860,6 +5489,112 @@
       <p:sp>
         <p:nvSpPr>
           <p:cNvPr id="5" name="Text 3"/>
+          <p:cNvSpPr/>
+          <p:nvPr/>
+        </p:nvSpPr>
+        <p:spPr>
+          <a:xfrm>
+            <a:off x="634901" y="1472654"/>
+            <a:ext cx="8102798" cy="487561"/>
+          </a:xfrm>
+          <a:prstGeom prst="rect">
+            <a:avLst/>
+          </a:prstGeom>
+          <a:noFill/>
+          <a:ln/>
+        </p:spPr>
+        <p:txBody>
+          <a:bodyPr wrap="square" lIns="0" tIns="0" rIns="0" bIns="0" rtlCol="0" anchor="t"/>
+          <a:lstStyle/>
+          <a:p>
+            <a:pPr algn="l" marL="342900" indent="-342900">
+              <a:lnSpc>
+                <a:spcPts val="1620"/>
+              </a:lnSpc>
+              <a:spcAft>
+                <a:spcPts val="300"/>
+              </a:spcAft>
+              <a:buSzPct val="100000"/>
+              <a:buChar char="•"/>
+            </a:pPr>
+            <a:r>
+              <a:rPr lang="en-US" sz="1200" b="1" dirty="0">
+                <a:solidFill>
+                  <a:srgbClr val="1A1A1A"/>
+                </a:solidFill>
+                <a:latin typeface="Georgia" pitchFamily="34" charset="0"/>
+                <a:ea typeface="Georgia" pitchFamily="34" charset="-122"/>
+                <a:cs typeface="Georgia" pitchFamily="34" charset="-120"/>
+              </a:rPr>
+              <a:t>Source.</a:t>
+            </a:r>
+            <a:pPr algn="l" indent="0" marL="0">
+              <a:lnSpc>
+                <a:spcPts val="1620"/>
+              </a:lnSpc>
+              <a:spcAft>
+                <a:spcPts val="300"/>
+              </a:spcAft>
+              <a:buNone/>
+            </a:pPr>
+            <a:r>
+              <a:rPr lang="en-US" sz="1200" dirty="0">
+                <a:solidFill>
+                  <a:srgbClr val="1A1A1A"/>
+                </a:solidFill>
+                <a:latin typeface="Georgia" pitchFamily="34" charset="0"/>
+                <a:ea typeface="Georgia" pitchFamily="34" charset="-122"/>
+                <a:cs typeface="Georgia" pitchFamily="34" charset="-120"/>
+              </a:rPr>
+              <a:t> Atharva Veda 10.97 — Auṣadhi Sūkta — though not naming tulasī specifically, the framing of "herbs as healing beings" begins here. Caraka </a:t>
+            </a:r>
+            <a:pPr algn="l" indent="0" marL="0">
+              <a:lnSpc>
+                <a:spcPts val="1620"/>
+              </a:lnSpc>
+              <a:spcAft>
+                <a:spcPts val="300"/>
+              </a:spcAft>
+              <a:buNone/>
+            </a:pPr>
+            <a:r>
+              <a:rPr lang="en-US" sz="1200" i="1" dirty="0">
+                <a:solidFill>
+                  <a:srgbClr val="1A1A1A"/>
+                </a:solidFill>
+                <a:latin typeface="Georgia" pitchFamily="34" charset="0"/>
+                <a:ea typeface="Georgia" pitchFamily="34" charset="-122"/>
+                <a:cs typeface="Georgia" pitchFamily="34" charset="-120"/>
+              </a:rPr>
+              <a:t>Sūtrasthāna</a:t>
+            </a:r>
+            <a:pPr algn="l" indent="0" marL="0">
+              <a:lnSpc>
+                <a:spcPts val="1620"/>
+              </a:lnSpc>
+              <a:spcAft>
+                <a:spcPts val="300"/>
+              </a:spcAft>
+              <a:buNone/>
+            </a:pPr>
+            <a:r>
+              <a:rPr lang="en-US" sz="1200" dirty="0">
+                <a:solidFill>
+                  <a:srgbClr val="1A1A1A"/>
+                </a:solidFill>
+                <a:latin typeface="Georgia" pitchFamily="34" charset="0"/>
+                <a:ea typeface="Georgia" pitchFamily="34" charset="-122"/>
+                <a:cs typeface="Georgia" pitchFamily="34" charset="-120"/>
+              </a:rPr>
+              <a:t> 26 lists tulasī formally.</a:t>
+            </a:r>
+            <a:endParaRPr lang="en-US" sz="1200" dirty="0"/>
+          </a:p>
+        </p:txBody>
+      </p:sp>
+      <p:sp>
+        <p:nvSpPr>
+          <p:cNvPr id="6" name="Text 4"/>
           <p:cNvSpPr/>
           <p:nvPr/>
         </p:nvSpPr>
@@ -5009,7 +5744,7 @@
                 <a:ea typeface="Times New Roman" pitchFamily="34" charset="-122"/>
                 <a:cs typeface="Times New Roman" pitchFamily="34" charset="-120"/>
               </a:rPr>
-              <a:t>Homework</a:t>
+              <a:t>Core (20 min) (cont.)</a:t>
             </a:r>
             <a:endParaRPr lang="en-US" sz="1800" dirty="0"/>
           </a:p>
@@ -5023,8 +5758,8 @@
         </p:nvSpPr>
         <p:spPr>
           <a:xfrm>
-            <a:off x="406301" y="870942"/>
-            <a:ext cx="8498026" cy="222796"/>
+            <a:off x="634901" y="883593"/>
+            <a:ext cx="8102798" cy="487561"/>
           </a:xfrm>
           <a:prstGeom prst="rect">
             <a:avLst/>
@@ -5036,13 +5771,31 @@
           <a:bodyPr wrap="square" lIns="0" tIns="0" rIns="0" bIns="0" rtlCol="0" anchor="t"/>
           <a:lstStyle/>
           <a:p>
-            <a:pPr algn="l" indent="0" marL="0">
-              <a:lnSpc>
-                <a:spcPts val="1680"/>
-              </a:lnSpc>
-              <a:spcBef>
-                <a:spcPts val="300"/>
-              </a:spcBef>
+            <a:pPr algn="l" marL="342900" indent="-342900">
+              <a:lnSpc>
+                <a:spcPts val="1620"/>
+              </a:lnSpc>
+              <a:spcAft>
+                <a:spcPts val="300"/>
+              </a:spcAft>
+              <a:buSzPct val="100000"/>
+              <a:buChar char="•"/>
+            </a:pPr>
+            <a:r>
+              <a:rPr lang="en-US" sz="1200" b="1" dirty="0">
+                <a:solidFill>
+                  <a:srgbClr val="1A1A1A"/>
+                </a:solidFill>
+                <a:latin typeface="Georgia" pitchFamily="34" charset="0"/>
+                <a:ea typeface="Georgia" pitchFamily="34" charset="-122"/>
+                <a:cs typeface="Georgia" pitchFamily="34" charset="-120"/>
+              </a:rPr>
+              <a:t>Smell-test demo.</a:t>
+            </a:r>
+            <a:pPr algn="l" indent="0" marL="0">
+              <a:lnSpc>
+                <a:spcPts val="1620"/>
+              </a:lnSpc>
               <a:spcAft>
                 <a:spcPts val="300"/>
               </a:spcAft>
@@ -5057,53 +5810,7 @@
                 <a:ea typeface="Georgia" pitchFamily="34" charset="-122"/>
                 <a:cs typeface="Georgia" pitchFamily="34" charset="-120"/>
               </a:rPr>
-              <a:t>(See </a:t>
-            </a:r>
-            <a:pPr algn="l" indent="0" marL="0">
-              <a:lnSpc>
-                <a:spcPts val="1680"/>
-              </a:lnSpc>
-              <a:spcBef>
-                <a:spcPts val="300"/>
-              </a:spcBef>
-              <a:spcAft>
-                <a:spcPts val="300"/>
-              </a:spcAft>
-              <a:buNone/>
-            </a:pPr>
-            <a:r>
-              <a:rPr lang="en-US" sz="1200" dirty="0">
-                <a:solidFill>
-                  <a:srgbClr val="1A1A1A"/>
-                </a:solidFill>
-                <a:latin typeface="Georgia" pitchFamily="34" charset="0"/>
-                <a:ea typeface="Georgia" pitchFamily="34" charset="-122"/>
-                <a:cs typeface="Georgia" pitchFamily="34" charset="-120"/>
-              </a:rPr>
-              <a:t>homework.md</a:t>
-            </a:r>
-            <a:pPr algn="l" indent="0" marL="0">
-              <a:lnSpc>
-                <a:spcPts val="1680"/>
-              </a:lnSpc>
-              <a:spcBef>
-                <a:spcPts val="300"/>
-              </a:spcBef>
-              <a:spcAft>
-                <a:spcPts val="300"/>
-              </a:spcAft>
-              <a:buNone/>
-            </a:pPr>
-            <a:r>
-              <a:rPr lang="en-US" sz="1200" dirty="0">
-                <a:solidFill>
-                  <a:srgbClr val="1A1A1A"/>
-                </a:solidFill>
-                <a:latin typeface="Georgia" pitchFamily="34" charset="0"/>
-                <a:ea typeface="Georgia" pitchFamily="34" charset="-122"/>
-                <a:cs typeface="Georgia" pitchFamily="34" charset="-120"/>
-              </a:rPr>
-              <a:t> for today's task.)</a:t>
+              <a:t> Crush a leaf; pass around. Note clove-like aroma (eugenol). Modern aroma-chemistry: same compound (eugenol) gives cloves their scent.</a:t>
             </a:r>
             <a:endParaRPr lang="en-US" sz="1200" dirty="0"/>
           </a:p>
